--- a/teaching/2026Summer/5070/Slides/7.pptx
+++ b/teaching/2026Summer/5070/Slides/7.pptx
@@ -4,6 +4,9 @@
   <p:sldMasterIdLst>
     <p:sldMasterId id="2147483648" r:id="rId1"/>
   </p:sldMasterIdLst>
+  <p:notesMasterIdLst>
+    <p:notesMasterId r:id="rId13"/>
+  </p:notesMasterIdLst>
   <p:sldIdLst>
     <p:sldId id="256" r:id="rId2"/>
     <p:sldId id="257" r:id="rId3"/>
@@ -41,6 +44,1796 @@
     </p:ext>
   </p:extLst>
 </p:presentation>
+</file>
+
+<file path=ppt/revisionInfo.xml><?xml version="1.0" encoding="utf-8"?>
+<p1510:revInfo xmlns:a="http://schemas.openxmlformats.org/drawingml/2006/main" xmlns:r="http://schemas.openxmlformats.org/officeDocument/2006/relationships" xmlns:p1510="http://schemas.microsoft.com/office/powerpoint/2015/10/main">
+  <p1510:revLst>
+    <p1510:client id="{D3E43593-BDC4-504B-AA2A-F25BEB85771B}" v="118" dt="2026-06-02T17:37:02.066"/>
+  </p1510:revLst>
+</p1510:revInfo>
+</file>
+
+<file path=ppt/changesInfos/changesInfo1.xml><?xml version="1.0" encoding="utf-8"?>
+<pc:chgInfo xmlns:a="http://schemas.openxmlformats.org/drawingml/2006/main" xmlns:r="http://schemas.openxmlformats.org/officeDocument/2006/relationships" xmlns:ac="http://schemas.microsoft.com/office/drawing/2013/main/command" xmlns:pc="http://schemas.microsoft.com/office/powerpoint/2013/main/command">
+  <pc:docChgLst>
+    <pc:chgData name="Kun Suo" userId="41c30799-3a2b-4880-86a3-8488be07954a" providerId="ADAL" clId="{01B90814-4EBE-5562-8795-CE1E7277191D}"/>
+    <pc:docChg chg="custSel modSld">
+      <pc:chgData name="Kun Suo" userId="41c30799-3a2b-4880-86a3-8488be07954a" providerId="ADAL" clId="{01B90814-4EBE-5562-8795-CE1E7277191D}" dt="2026-06-02T17:37:02.066" v="203"/>
+      <pc:docMkLst>
+        <pc:docMk/>
+      </pc:docMkLst>
+      <pc:sldChg chg="modSp mod">
+        <pc:chgData name="Kun Suo" userId="41c30799-3a2b-4880-86a3-8488be07954a" providerId="ADAL" clId="{01B90814-4EBE-5562-8795-CE1E7277191D}" dt="2026-06-02T17:01:44.472" v="8" actId="14100"/>
+        <pc:sldMkLst>
+          <pc:docMk/>
+          <pc:sldMk cId="0" sldId="259"/>
+        </pc:sldMkLst>
+        <pc:spChg chg="mod">
+          <ac:chgData name="Kun Suo" userId="41c30799-3a2b-4880-86a3-8488be07954a" providerId="ADAL" clId="{01B90814-4EBE-5562-8795-CE1E7277191D}" dt="2026-06-02T17:01:44.472" v="8" actId="14100"/>
+          <ac:spMkLst>
+            <pc:docMk/>
+            <pc:sldMk cId="0" sldId="259"/>
+            <ac:spMk id="6" creationId="{00000000-0000-0000-0000-000000000000}"/>
+          </ac:spMkLst>
+        </pc:spChg>
+      </pc:sldChg>
+      <pc:sldChg chg="addSp delSp modSp mod">
+        <pc:chgData name="Kun Suo" userId="41c30799-3a2b-4880-86a3-8488be07954a" providerId="ADAL" clId="{01B90814-4EBE-5562-8795-CE1E7277191D}" dt="2026-06-02T17:25:27.883" v="38"/>
+        <pc:sldMkLst>
+          <pc:docMk/>
+          <pc:sldMk cId="0" sldId="261"/>
+        </pc:sldMkLst>
+        <pc:grpChg chg="del mod">
+          <ac:chgData name="Kun Suo" userId="41c30799-3a2b-4880-86a3-8488be07954a" providerId="ADAL" clId="{01B90814-4EBE-5562-8795-CE1E7277191D}" dt="2026-06-02T17:25:07.356" v="11"/>
+          <ac:grpSpMkLst>
+            <pc:docMk/>
+            <pc:sldMk cId="0" sldId="261"/>
+            <ac:grpSpMk id="13" creationId="{30A7DD4F-98EC-E7F7-BFD4-9397A136F6A6}"/>
+          </ac:grpSpMkLst>
+        </pc:grpChg>
+        <pc:grpChg chg="del mod">
+          <ac:chgData name="Kun Suo" userId="41c30799-3a2b-4880-86a3-8488be07954a" providerId="ADAL" clId="{01B90814-4EBE-5562-8795-CE1E7277191D}" dt="2026-06-02T17:25:09.194" v="13"/>
+          <ac:grpSpMkLst>
+            <pc:docMk/>
+            <pc:sldMk cId="0" sldId="261"/>
+            <ac:grpSpMk id="14" creationId="{6F5A472D-E20B-368A-AC81-7C5830BF99B9}"/>
+          </ac:grpSpMkLst>
+        </pc:grpChg>
+        <pc:grpChg chg="del mod">
+          <ac:chgData name="Kun Suo" userId="41c30799-3a2b-4880-86a3-8488be07954a" providerId="ADAL" clId="{01B90814-4EBE-5562-8795-CE1E7277191D}" dt="2026-06-02T17:25:09.194" v="13"/>
+          <ac:grpSpMkLst>
+            <pc:docMk/>
+            <pc:sldMk cId="0" sldId="261"/>
+            <ac:grpSpMk id="16" creationId="{88A414B5-4152-55EE-BCB1-106BE69EACD8}"/>
+          </ac:grpSpMkLst>
+        </pc:grpChg>
+        <pc:grpChg chg="del mod">
+          <ac:chgData name="Kun Suo" userId="41c30799-3a2b-4880-86a3-8488be07954a" providerId="ADAL" clId="{01B90814-4EBE-5562-8795-CE1E7277191D}" dt="2026-06-02T17:25:11.005" v="15"/>
+          <ac:grpSpMkLst>
+            <pc:docMk/>
+            <pc:sldMk cId="0" sldId="261"/>
+            <ac:grpSpMk id="17" creationId="{41085623-206A-64BC-4736-297FA67F03BF}"/>
+          </ac:grpSpMkLst>
+        </pc:grpChg>
+        <pc:grpChg chg="del mod">
+          <ac:chgData name="Kun Suo" userId="41c30799-3a2b-4880-86a3-8488be07954a" providerId="ADAL" clId="{01B90814-4EBE-5562-8795-CE1E7277191D}" dt="2026-06-02T17:25:11.005" v="15"/>
+          <ac:grpSpMkLst>
+            <pc:docMk/>
+            <pc:sldMk cId="0" sldId="261"/>
+            <ac:grpSpMk id="19" creationId="{5A92552D-2320-6B0F-DF59-3EDD5DED95F6}"/>
+          </ac:grpSpMkLst>
+        </pc:grpChg>
+        <pc:grpChg chg="del mod">
+          <ac:chgData name="Kun Suo" userId="41c30799-3a2b-4880-86a3-8488be07954a" providerId="ADAL" clId="{01B90814-4EBE-5562-8795-CE1E7277191D}" dt="2026-06-02T17:25:12.610" v="17"/>
+          <ac:grpSpMkLst>
+            <pc:docMk/>
+            <pc:sldMk cId="0" sldId="261"/>
+            <ac:grpSpMk id="20" creationId="{5BCF9195-186C-A1DD-87FC-3089D5D37C36}"/>
+          </ac:grpSpMkLst>
+        </pc:grpChg>
+        <pc:grpChg chg="del mod">
+          <ac:chgData name="Kun Suo" userId="41c30799-3a2b-4880-86a3-8488be07954a" providerId="ADAL" clId="{01B90814-4EBE-5562-8795-CE1E7277191D}" dt="2026-06-02T17:25:12.610" v="17"/>
+          <ac:grpSpMkLst>
+            <pc:docMk/>
+            <pc:sldMk cId="0" sldId="261"/>
+            <ac:grpSpMk id="22" creationId="{D1F6A357-BFB5-A5FC-C8A6-A2AA6AADC4C5}"/>
+          </ac:grpSpMkLst>
+        </pc:grpChg>
+        <pc:grpChg chg="del mod">
+          <ac:chgData name="Kun Suo" userId="41c30799-3a2b-4880-86a3-8488be07954a" providerId="ADAL" clId="{01B90814-4EBE-5562-8795-CE1E7277191D}" dt="2026-06-02T17:25:14.144" v="19"/>
+          <ac:grpSpMkLst>
+            <pc:docMk/>
+            <pc:sldMk cId="0" sldId="261"/>
+            <ac:grpSpMk id="23" creationId="{968A556D-2B84-C399-32FC-C8AF703DC8D1}"/>
+          </ac:grpSpMkLst>
+        </pc:grpChg>
+        <pc:grpChg chg="del mod">
+          <ac:chgData name="Kun Suo" userId="41c30799-3a2b-4880-86a3-8488be07954a" providerId="ADAL" clId="{01B90814-4EBE-5562-8795-CE1E7277191D}" dt="2026-06-02T17:25:14.144" v="19"/>
+          <ac:grpSpMkLst>
+            <pc:docMk/>
+            <pc:sldMk cId="0" sldId="261"/>
+            <ac:grpSpMk id="25" creationId="{AAEEF69C-B584-33CB-D4BB-2DF2B7E06BB4}"/>
+          </ac:grpSpMkLst>
+        </pc:grpChg>
+        <pc:grpChg chg="del mod">
+          <ac:chgData name="Kun Suo" userId="41c30799-3a2b-4880-86a3-8488be07954a" providerId="ADAL" clId="{01B90814-4EBE-5562-8795-CE1E7277191D}" dt="2026-06-02T17:25:27.882" v="37"/>
+          <ac:grpSpMkLst>
+            <pc:docMk/>
+            <pc:sldMk cId="0" sldId="261"/>
+            <ac:grpSpMk id="26" creationId="{9A6280E0-5825-3DB2-A93A-941BEA992C81}"/>
+          </ac:grpSpMkLst>
+        </pc:grpChg>
+        <pc:grpChg chg="del mod">
+          <ac:chgData name="Kun Suo" userId="41c30799-3a2b-4880-86a3-8488be07954a" providerId="ADAL" clId="{01B90814-4EBE-5562-8795-CE1E7277191D}" dt="2026-06-02T17:25:18.155" v="22"/>
+          <ac:grpSpMkLst>
+            <pc:docMk/>
+            <pc:sldMk cId="0" sldId="261"/>
+            <ac:grpSpMk id="29" creationId="{1FA115A6-645B-FCF4-83FD-0542B29E27AA}"/>
+          </ac:grpSpMkLst>
+        </pc:grpChg>
+        <pc:grpChg chg="del mod">
+          <ac:chgData name="Kun Suo" userId="41c30799-3a2b-4880-86a3-8488be07954a" providerId="ADAL" clId="{01B90814-4EBE-5562-8795-CE1E7277191D}" dt="2026-06-02T17:25:19.405" v="24"/>
+          <ac:grpSpMkLst>
+            <pc:docMk/>
+            <pc:sldMk cId="0" sldId="261"/>
+            <ac:grpSpMk id="30" creationId="{E484B974-6465-0557-AE9D-A726F7DDF8F6}"/>
+          </ac:grpSpMkLst>
+        </pc:grpChg>
+        <pc:grpChg chg="del mod">
+          <ac:chgData name="Kun Suo" userId="41c30799-3a2b-4880-86a3-8488be07954a" providerId="ADAL" clId="{01B90814-4EBE-5562-8795-CE1E7277191D}" dt="2026-06-02T17:25:19.405" v="24"/>
+          <ac:grpSpMkLst>
+            <pc:docMk/>
+            <pc:sldMk cId="0" sldId="261"/>
+            <ac:grpSpMk id="32" creationId="{E837AB16-2E16-A252-9F72-0C0C13CD67C4}"/>
+          </ac:grpSpMkLst>
+        </pc:grpChg>
+        <pc:grpChg chg="del mod">
+          <ac:chgData name="Kun Suo" userId="41c30799-3a2b-4880-86a3-8488be07954a" providerId="ADAL" clId="{01B90814-4EBE-5562-8795-CE1E7277191D}" dt="2026-06-02T17:25:27.881" v="32"/>
+          <ac:grpSpMkLst>
+            <pc:docMk/>
+            <pc:sldMk cId="0" sldId="261"/>
+            <ac:grpSpMk id="33" creationId="{D8E3BF8A-0B64-252E-9B7F-7934E9E297BD}"/>
+          </ac:grpSpMkLst>
+        </pc:grpChg>
+        <pc:grpChg chg="del mod">
+          <ac:chgData name="Kun Suo" userId="41c30799-3a2b-4880-86a3-8488be07954a" providerId="ADAL" clId="{01B90814-4EBE-5562-8795-CE1E7277191D}" dt="2026-06-02T17:25:22.905" v="27"/>
+          <ac:grpSpMkLst>
+            <pc:docMk/>
+            <pc:sldMk cId="0" sldId="261"/>
+            <ac:grpSpMk id="36" creationId="{D2438826-6959-3FCD-892D-496868A9800C}"/>
+          </ac:grpSpMkLst>
+        </pc:grpChg>
+        <pc:grpChg chg="del mod">
+          <ac:chgData name="Kun Suo" userId="41c30799-3a2b-4880-86a3-8488be07954a" providerId="ADAL" clId="{01B90814-4EBE-5562-8795-CE1E7277191D}" dt="2026-06-02T17:25:27.882" v="33"/>
+          <ac:grpSpMkLst>
+            <pc:docMk/>
+            <pc:sldMk cId="0" sldId="261"/>
+            <ac:grpSpMk id="37" creationId="{5D21114E-D0C5-D0D1-E63F-B10C2D20EFB3}"/>
+          </ac:grpSpMkLst>
+        </pc:grpChg>
+        <pc:inkChg chg="add del mod">
+          <ac:chgData name="Kun Suo" userId="41c30799-3a2b-4880-86a3-8488be07954a" providerId="ADAL" clId="{01B90814-4EBE-5562-8795-CE1E7277191D}" dt="2026-06-02T17:25:27.882" v="37"/>
+          <ac:inkMkLst>
+            <pc:docMk/>
+            <pc:sldMk cId="0" sldId="261"/>
+            <ac:inkMk id="11" creationId="{CC969C74-0AFB-8090-1402-898E9D9A8CF7}"/>
+          </ac:inkMkLst>
+        </pc:inkChg>
+        <pc:inkChg chg="add del mod">
+          <ac:chgData name="Kun Suo" userId="41c30799-3a2b-4880-86a3-8488be07954a" providerId="ADAL" clId="{01B90814-4EBE-5562-8795-CE1E7277191D}" dt="2026-06-02T17:25:27.882" v="35"/>
+          <ac:inkMkLst>
+            <pc:docMk/>
+            <pc:sldMk cId="0" sldId="261"/>
+            <ac:inkMk id="12" creationId="{CADAE5C5-A1CE-ADCD-1BF6-0572B827FD59}"/>
+          </ac:inkMkLst>
+        </pc:inkChg>
+        <pc:inkChg chg="add del mod">
+          <ac:chgData name="Kun Suo" userId="41c30799-3a2b-4880-86a3-8488be07954a" providerId="ADAL" clId="{01B90814-4EBE-5562-8795-CE1E7277191D}" dt="2026-06-02T17:25:27.881" v="31"/>
+          <ac:inkMkLst>
+            <pc:docMk/>
+            <pc:sldMk cId="0" sldId="261"/>
+            <ac:inkMk id="15" creationId="{E8016D7A-AF07-DF9B-0376-FDA8FCEC225C}"/>
+          </ac:inkMkLst>
+        </pc:inkChg>
+        <pc:inkChg chg="add del mod">
+          <ac:chgData name="Kun Suo" userId="41c30799-3a2b-4880-86a3-8488be07954a" providerId="ADAL" clId="{01B90814-4EBE-5562-8795-CE1E7277191D}" dt="2026-06-02T17:25:27.880" v="28"/>
+          <ac:inkMkLst>
+            <pc:docMk/>
+            <pc:sldMk cId="0" sldId="261"/>
+            <ac:inkMk id="18" creationId="{44854D16-755A-0AB9-3CF6-8EBC1B0FA850}"/>
+          </ac:inkMkLst>
+        </pc:inkChg>
+        <pc:inkChg chg="add del mod">
+          <ac:chgData name="Kun Suo" userId="41c30799-3a2b-4880-86a3-8488be07954a" providerId="ADAL" clId="{01B90814-4EBE-5562-8795-CE1E7277191D}" dt="2026-06-02T17:25:27.883" v="38"/>
+          <ac:inkMkLst>
+            <pc:docMk/>
+            <pc:sldMk cId="0" sldId="261"/>
+            <ac:inkMk id="21" creationId="{BC9CAD41-8594-C15D-E837-72AEB2D5C447}"/>
+          </ac:inkMkLst>
+        </pc:inkChg>
+        <pc:inkChg chg="add del mod">
+          <ac:chgData name="Kun Suo" userId="41c30799-3a2b-4880-86a3-8488be07954a" providerId="ADAL" clId="{01B90814-4EBE-5562-8795-CE1E7277191D}" dt="2026-06-02T17:25:27.880" v="29"/>
+          <ac:inkMkLst>
+            <pc:docMk/>
+            <pc:sldMk cId="0" sldId="261"/>
+            <ac:inkMk id="24" creationId="{7A80E341-5F9B-F08A-B9CA-40014AAEB25A}"/>
+          </ac:inkMkLst>
+        </pc:inkChg>
+        <pc:inkChg chg="add del mod">
+          <ac:chgData name="Kun Suo" userId="41c30799-3a2b-4880-86a3-8488be07954a" providerId="ADAL" clId="{01B90814-4EBE-5562-8795-CE1E7277191D}" dt="2026-06-02T17:25:27.881" v="32"/>
+          <ac:inkMkLst>
+            <pc:docMk/>
+            <pc:sldMk cId="0" sldId="261"/>
+            <ac:inkMk id="27" creationId="{ED03838A-BF9D-6E31-ABF2-AC35874C591C}"/>
+          </ac:inkMkLst>
+        </pc:inkChg>
+        <pc:inkChg chg="add del mod">
+          <ac:chgData name="Kun Suo" userId="41c30799-3a2b-4880-86a3-8488be07954a" providerId="ADAL" clId="{01B90814-4EBE-5562-8795-CE1E7277191D}" dt="2026-06-02T17:25:27.882" v="36"/>
+          <ac:inkMkLst>
+            <pc:docMk/>
+            <pc:sldMk cId="0" sldId="261"/>
+            <ac:inkMk id="28" creationId="{F4890E73-0ACE-A0CC-84DA-821BCB0F13A2}"/>
+          </ac:inkMkLst>
+        </pc:inkChg>
+        <pc:inkChg chg="add del mod">
+          <ac:chgData name="Kun Suo" userId="41c30799-3a2b-4880-86a3-8488be07954a" providerId="ADAL" clId="{01B90814-4EBE-5562-8795-CE1E7277191D}" dt="2026-06-02T17:25:27.881" v="30"/>
+          <ac:inkMkLst>
+            <pc:docMk/>
+            <pc:sldMk cId="0" sldId="261"/>
+            <ac:inkMk id="31" creationId="{FA1EBA1C-B177-5C6D-6915-48A9E733466D}"/>
+          </ac:inkMkLst>
+        </pc:inkChg>
+        <pc:inkChg chg="add del mod">
+          <ac:chgData name="Kun Suo" userId="41c30799-3a2b-4880-86a3-8488be07954a" providerId="ADAL" clId="{01B90814-4EBE-5562-8795-CE1E7277191D}" dt="2026-06-02T17:25:27.882" v="34"/>
+          <ac:inkMkLst>
+            <pc:docMk/>
+            <pc:sldMk cId="0" sldId="261"/>
+            <ac:inkMk id="34" creationId="{CC083F64-9950-6A6F-87AE-1D34B8BCD02E}"/>
+          </ac:inkMkLst>
+        </pc:inkChg>
+        <pc:inkChg chg="add del mod">
+          <ac:chgData name="Kun Suo" userId="41c30799-3a2b-4880-86a3-8488be07954a" providerId="ADAL" clId="{01B90814-4EBE-5562-8795-CE1E7277191D}" dt="2026-06-02T17:25:27.882" v="33"/>
+          <ac:inkMkLst>
+            <pc:docMk/>
+            <pc:sldMk cId="0" sldId="261"/>
+            <ac:inkMk id="35" creationId="{3E7DD52B-88E9-7746-0D84-5AD755029C41}"/>
+          </ac:inkMkLst>
+        </pc:inkChg>
+      </pc:sldChg>
+      <pc:sldChg chg="addSp delSp modSp mod">
+        <pc:chgData name="Kun Suo" userId="41c30799-3a2b-4880-86a3-8488be07954a" providerId="ADAL" clId="{01B90814-4EBE-5562-8795-CE1E7277191D}" dt="2026-06-02T17:30:11.815" v="95"/>
+        <pc:sldMkLst>
+          <pc:docMk/>
+          <pc:sldMk cId="0" sldId="263"/>
+        </pc:sldMkLst>
+        <pc:grpChg chg="del mod">
+          <ac:chgData name="Kun Suo" userId="41c30799-3a2b-4880-86a3-8488be07954a" providerId="ADAL" clId="{01B90814-4EBE-5562-8795-CE1E7277191D}" dt="2026-06-02T17:28:39.127" v="41"/>
+          <ac:grpSpMkLst>
+            <pc:docMk/>
+            <pc:sldMk cId="0" sldId="263"/>
+            <ac:grpSpMk id="11" creationId="{9C24B516-3324-15B1-504F-757CF384A1A5}"/>
+          </ac:grpSpMkLst>
+        </pc:grpChg>
+        <pc:grpChg chg="del mod">
+          <ac:chgData name="Kun Suo" userId="41c30799-3a2b-4880-86a3-8488be07954a" providerId="ADAL" clId="{01B90814-4EBE-5562-8795-CE1E7277191D}" dt="2026-06-02T17:30:11.811" v="74"/>
+          <ac:grpSpMkLst>
+            <pc:docMk/>
+            <pc:sldMk cId="0" sldId="263"/>
+            <ac:grpSpMk id="12" creationId="{2AB5C935-1598-B8F3-CF36-E6D18BB33F39}"/>
+          </ac:grpSpMkLst>
+        </pc:grpChg>
+        <pc:grpChg chg="del mod">
+          <ac:chgData name="Kun Suo" userId="41c30799-3a2b-4880-86a3-8488be07954a" providerId="ADAL" clId="{01B90814-4EBE-5562-8795-CE1E7277191D}" dt="2026-06-02T17:28:50.494" v="46"/>
+          <ac:grpSpMkLst>
+            <pc:docMk/>
+            <pc:sldMk cId="0" sldId="263"/>
+            <ac:grpSpMk id="17" creationId="{51E11E1F-4850-9D52-31AC-51DC104A249B}"/>
+          </ac:grpSpMkLst>
+        </pc:grpChg>
+        <pc:grpChg chg="del mod">
+          <ac:chgData name="Kun Suo" userId="41c30799-3a2b-4880-86a3-8488be07954a" providerId="ADAL" clId="{01B90814-4EBE-5562-8795-CE1E7277191D}" dt="2026-06-02T17:30:11.813" v="85"/>
+          <ac:grpSpMkLst>
+            <pc:docMk/>
+            <pc:sldMk cId="0" sldId="263"/>
+            <ac:grpSpMk id="18" creationId="{A55E9B24-BC9A-C2D2-AB02-2A5EE3A6AC0E}"/>
+          </ac:grpSpMkLst>
+        </pc:grpChg>
+        <pc:grpChg chg="del mod">
+          <ac:chgData name="Kun Suo" userId="41c30799-3a2b-4880-86a3-8488be07954a" providerId="ADAL" clId="{01B90814-4EBE-5562-8795-CE1E7277191D}" dt="2026-06-02T17:28:53.585" v="49"/>
+          <ac:grpSpMkLst>
+            <pc:docMk/>
+            <pc:sldMk cId="0" sldId="263"/>
+            <ac:grpSpMk id="21" creationId="{B824C1BA-975E-B1D9-8208-E6ED00752E53}"/>
+          </ac:grpSpMkLst>
+        </pc:grpChg>
+        <pc:grpChg chg="del mod">
+          <ac:chgData name="Kun Suo" userId="41c30799-3a2b-4880-86a3-8488be07954a" providerId="ADAL" clId="{01B90814-4EBE-5562-8795-CE1E7277191D}" dt="2026-06-02T17:30:11.813" v="84"/>
+          <ac:grpSpMkLst>
+            <pc:docMk/>
+            <pc:sldMk cId="0" sldId="263"/>
+            <ac:grpSpMk id="22" creationId="{4466F760-07BE-5225-A9F6-06B9FAA42DE4}"/>
+          </ac:grpSpMkLst>
+        </pc:grpChg>
+        <pc:grpChg chg="del mod">
+          <ac:chgData name="Kun Suo" userId="41c30799-3a2b-4880-86a3-8488be07954a" providerId="ADAL" clId="{01B90814-4EBE-5562-8795-CE1E7277191D}" dt="2026-06-02T17:29:01.452" v="53"/>
+          <ac:grpSpMkLst>
+            <pc:docMk/>
+            <pc:sldMk cId="0" sldId="263"/>
+            <ac:grpSpMk id="26" creationId="{99E62536-57D6-5CF7-9755-CD2D3A931EB6}"/>
+          </ac:grpSpMkLst>
+        </pc:grpChg>
+        <pc:grpChg chg="del mod">
+          <ac:chgData name="Kun Suo" userId="41c30799-3a2b-4880-86a3-8488be07954a" providerId="ADAL" clId="{01B90814-4EBE-5562-8795-CE1E7277191D}" dt="2026-06-02T17:29:02.702" v="55"/>
+          <ac:grpSpMkLst>
+            <pc:docMk/>
+            <pc:sldMk cId="0" sldId="263"/>
+            <ac:grpSpMk id="27" creationId="{5B5B8938-BFD2-0361-E62E-BBA0837129FE}"/>
+          </ac:grpSpMkLst>
+        </pc:grpChg>
+        <pc:grpChg chg="del mod">
+          <ac:chgData name="Kun Suo" userId="41c30799-3a2b-4880-86a3-8488be07954a" providerId="ADAL" clId="{01B90814-4EBE-5562-8795-CE1E7277191D}" dt="2026-06-02T17:29:02.702" v="55"/>
+          <ac:grpSpMkLst>
+            <pc:docMk/>
+            <pc:sldMk cId="0" sldId="263"/>
+            <ac:grpSpMk id="29" creationId="{8E227B7F-DF31-D681-894E-15DA6CF1072F}"/>
+          </ac:grpSpMkLst>
+        </pc:grpChg>
+        <pc:grpChg chg="del mod">
+          <ac:chgData name="Kun Suo" userId="41c30799-3a2b-4880-86a3-8488be07954a" providerId="ADAL" clId="{01B90814-4EBE-5562-8795-CE1E7277191D}" dt="2026-06-02T17:30:11.814" v="86"/>
+          <ac:grpSpMkLst>
+            <pc:docMk/>
+            <pc:sldMk cId="0" sldId="263"/>
+            <ac:grpSpMk id="30" creationId="{288C1F18-B593-524E-87E9-737239F7A9C4}"/>
+          </ac:grpSpMkLst>
+        </pc:grpChg>
+        <pc:grpChg chg="del mod">
+          <ac:chgData name="Kun Suo" userId="41c30799-3a2b-4880-86a3-8488be07954a" providerId="ADAL" clId="{01B90814-4EBE-5562-8795-CE1E7277191D}" dt="2026-06-02T17:29:15.221" v="58"/>
+          <ac:grpSpMkLst>
+            <pc:docMk/>
+            <pc:sldMk cId="0" sldId="263"/>
+            <ac:grpSpMk id="33" creationId="{27F58730-79AA-8728-F8D4-14705093AECB}"/>
+          </ac:grpSpMkLst>
+        </pc:grpChg>
+        <pc:grpChg chg="del mod">
+          <ac:chgData name="Kun Suo" userId="41c30799-3a2b-4880-86a3-8488be07954a" providerId="ADAL" clId="{01B90814-4EBE-5562-8795-CE1E7277191D}" dt="2026-06-02T17:30:11.812" v="77"/>
+          <ac:grpSpMkLst>
+            <pc:docMk/>
+            <pc:sldMk cId="0" sldId="263"/>
+            <ac:grpSpMk id="34" creationId="{0C9DDE7F-2D82-AE18-C7A0-3CC17DB342CB}"/>
+          </ac:grpSpMkLst>
+        </pc:grpChg>
+        <pc:grpChg chg="del mod">
+          <ac:chgData name="Kun Suo" userId="41c30799-3a2b-4880-86a3-8488be07954a" providerId="ADAL" clId="{01B90814-4EBE-5562-8795-CE1E7277191D}" dt="2026-06-02T17:29:17.749" v="61"/>
+          <ac:grpSpMkLst>
+            <pc:docMk/>
+            <pc:sldMk cId="0" sldId="263"/>
+            <ac:grpSpMk id="37" creationId="{AE9DF0DE-C56E-7BF6-8684-C15D09D830DD}"/>
+          </ac:grpSpMkLst>
+        </pc:grpChg>
+        <pc:grpChg chg="del mod">
+          <ac:chgData name="Kun Suo" userId="41c30799-3a2b-4880-86a3-8488be07954a" providerId="ADAL" clId="{01B90814-4EBE-5562-8795-CE1E7277191D}" dt="2026-06-02T17:29:19.003" v="63"/>
+          <ac:grpSpMkLst>
+            <pc:docMk/>
+            <pc:sldMk cId="0" sldId="263"/>
+            <ac:grpSpMk id="38" creationId="{B0A6A1EE-790A-7F99-6F86-B94C0D76F680}"/>
+          </ac:grpSpMkLst>
+        </pc:grpChg>
+        <pc:grpChg chg="del mod">
+          <ac:chgData name="Kun Suo" userId="41c30799-3a2b-4880-86a3-8488be07954a" providerId="ADAL" clId="{01B90814-4EBE-5562-8795-CE1E7277191D}" dt="2026-06-02T17:29:19.003" v="63"/>
+          <ac:grpSpMkLst>
+            <pc:docMk/>
+            <pc:sldMk cId="0" sldId="263"/>
+            <ac:grpSpMk id="40" creationId="{FBBA767C-C789-87C1-41E1-80C828A1434F}"/>
+          </ac:grpSpMkLst>
+        </pc:grpChg>
+        <pc:grpChg chg="del mod">
+          <ac:chgData name="Kun Suo" userId="41c30799-3a2b-4880-86a3-8488be07954a" providerId="ADAL" clId="{01B90814-4EBE-5562-8795-CE1E7277191D}" dt="2026-06-02T17:30:11.812" v="80"/>
+          <ac:grpSpMkLst>
+            <pc:docMk/>
+            <pc:sldMk cId="0" sldId="263"/>
+            <ac:grpSpMk id="41" creationId="{377698E5-A027-E4F0-7C8F-65CD16F5B2CD}"/>
+          </ac:grpSpMkLst>
+        </pc:grpChg>
+        <pc:grpChg chg="del mod">
+          <ac:chgData name="Kun Suo" userId="41c30799-3a2b-4880-86a3-8488be07954a" providerId="ADAL" clId="{01B90814-4EBE-5562-8795-CE1E7277191D}" dt="2026-06-02T17:29:27.153" v="66"/>
+          <ac:grpSpMkLst>
+            <pc:docMk/>
+            <pc:sldMk cId="0" sldId="263"/>
+            <ac:grpSpMk id="44" creationId="{667CBEFD-3C0B-FB08-32AF-0BA3D3067C70}"/>
+          </ac:grpSpMkLst>
+        </pc:grpChg>
+        <pc:grpChg chg="del mod">
+          <ac:chgData name="Kun Suo" userId="41c30799-3a2b-4880-86a3-8488be07954a" providerId="ADAL" clId="{01B90814-4EBE-5562-8795-CE1E7277191D}" dt="2026-06-02T17:30:11.815" v="91"/>
+          <ac:grpSpMkLst>
+            <pc:docMk/>
+            <pc:sldMk cId="0" sldId="263"/>
+            <ac:grpSpMk id="45" creationId="{EA34DF8A-5594-1BA6-5BA8-3CD3C96F27AF}"/>
+          </ac:grpSpMkLst>
+        </pc:grpChg>
+        <pc:grpChg chg="del mod">
+          <ac:chgData name="Kun Suo" userId="41c30799-3a2b-4880-86a3-8488be07954a" providerId="ADAL" clId="{01B90814-4EBE-5562-8795-CE1E7277191D}" dt="2026-06-02T17:29:31.361" v="70"/>
+          <ac:grpSpMkLst>
+            <pc:docMk/>
+            <pc:sldMk cId="0" sldId="263"/>
+            <ac:grpSpMk id="49" creationId="{4D7666D1-7368-89FB-F301-81FCFE4E935F}"/>
+          </ac:grpSpMkLst>
+        </pc:grpChg>
+        <pc:grpChg chg="del mod">
+          <ac:chgData name="Kun Suo" userId="41c30799-3a2b-4880-86a3-8488be07954a" providerId="ADAL" clId="{01B90814-4EBE-5562-8795-CE1E7277191D}" dt="2026-06-02T17:29:32.774" v="72"/>
+          <ac:grpSpMkLst>
+            <pc:docMk/>
+            <pc:sldMk cId="0" sldId="263"/>
+            <ac:grpSpMk id="50" creationId="{AE647262-F9EF-DE9E-FEE7-94D1C03879F4}"/>
+          </ac:grpSpMkLst>
+        </pc:grpChg>
+        <pc:grpChg chg="del mod">
+          <ac:chgData name="Kun Suo" userId="41c30799-3a2b-4880-86a3-8488be07954a" providerId="ADAL" clId="{01B90814-4EBE-5562-8795-CE1E7277191D}" dt="2026-06-02T17:29:32.774" v="72"/>
+          <ac:grpSpMkLst>
+            <pc:docMk/>
+            <pc:sldMk cId="0" sldId="263"/>
+            <ac:grpSpMk id="52" creationId="{245443FE-E280-C754-ACE3-6D23A84E5696}"/>
+          </ac:grpSpMkLst>
+        </pc:grpChg>
+        <pc:grpChg chg="del mod">
+          <ac:chgData name="Kun Suo" userId="41c30799-3a2b-4880-86a3-8488be07954a" providerId="ADAL" clId="{01B90814-4EBE-5562-8795-CE1E7277191D}" dt="2026-06-02T17:30:11.812" v="81"/>
+          <ac:grpSpMkLst>
+            <pc:docMk/>
+            <pc:sldMk cId="0" sldId="263"/>
+            <ac:grpSpMk id="53" creationId="{E625D358-6628-5524-C5F4-C28AEE92232F}"/>
+          </ac:grpSpMkLst>
+        </pc:grpChg>
+        <pc:inkChg chg="add del mod">
+          <ac:chgData name="Kun Suo" userId="41c30799-3a2b-4880-86a3-8488be07954a" providerId="ADAL" clId="{01B90814-4EBE-5562-8795-CE1E7277191D}" dt="2026-06-02T17:30:11.811" v="74"/>
+          <ac:inkMkLst>
+            <pc:docMk/>
+            <pc:sldMk cId="0" sldId="263"/>
+            <ac:inkMk id="9" creationId="{80375CD5-ACD2-B85A-3778-D0F26E02844B}"/>
+          </ac:inkMkLst>
+        </pc:inkChg>
+        <pc:inkChg chg="add del mod">
+          <ac:chgData name="Kun Suo" userId="41c30799-3a2b-4880-86a3-8488be07954a" providerId="ADAL" clId="{01B90814-4EBE-5562-8795-CE1E7277191D}" dt="2026-06-02T17:30:11.811" v="75"/>
+          <ac:inkMkLst>
+            <pc:docMk/>
+            <pc:sldMk cId="0" sldId="263"/>
+            <ac:inkMk id="10" creationId="{779EC847-3F27-F21B-AD07-907B838627B0}"/>
+          </ac:inkMkLst>
+        </pc:inkChg>
+        <pc:inkChg chg="add del">
+          <ac:chgData name="Kun Suo" userId="41c30799-3a2b-4880-86a3-8488be07954a" providerId="ADAL" clId="{01B90814-4EBE-5562-8795-CE1E7277191D}" dt="2026-06-02T17:30:11.810" v="73"/>
+          <ac:inkMkLst>
+            <pc:docMk/>
+            <pc:sldMk cId="0" sldId="263"/>
+            <ac:inkMk id="13" creationId="{00501319-BBF6-66A0-8BDB-5DC72EF6DCE1}"/>
+          </ac:inkMkLst>
+        </pc:inkChg>
+        <pc:inkChg chg="add del mod">
+          <ac:chgData name="Kun Suo" userId="41c30799-3a2b-4880-86a3-8488be07954a" providerId="ADAL" clId="{01B90814-4EBE-5562-8795-CE1E7277191D}" dt="2026-06-02T17:30:11.813" v="85"/>
+          <ac:inkMkLst>
+            <pc:docMk/>
+            <pc:sldMk cId="0" sldId="263"/>
+            <ac:inkMk id="14" creationId="{3EED5E9E-5F9D-E873-6F6D-A66B16C1DB97}"/>
+          </ac:inkMkLst>
+        </pc:inkChg>
+        <pc:inkChg chg="add del mod">
+          <ac:chgData name="Kun Suo" userId="41c30799-3a2b-4880-86a3-8488be07954a" providerId="ADAL" clId="{01B90814-4EBE-5562-8795-CE1E7277191D}" dt="2026-06-02T17:30:11.815" v="92"/>
+          <ac:inkMkLst>
+            <pc:docMk/>
+            <pc:sldMk cId="0" sldId="263"/>
+            <ac:inkMk id="15" creationId="{AB41A1DC-ADF8-D808-3AC3-3E1E1250C2CD}"/>
+          </ac:inkMkLst>
+        </pc:inkChg>
+        <pc:inkChg chg="add del">
+          <ac:chgData name="Kun Suo" userId="41c30799-3a2b-4880-86a3-8488be07954a" providerId="ADAL" clId="{01B90814-4EBE-5562-8795-CE1E7277191D}" dt="2026-06-02T17:30:11.813" v="83"/>
+          <ac:inkMkLst>
+            <pc:docMk/>
+            <pc:sldMk cId="0" sldId="263"/>
+            <ac:inkMk id="16" creationId="{02F62DB1-E1B6-05F1-328C-319D34089BBF}"/>
+          </ac:inkMkLst>
+        </pc:inkChg>
+        <pc:inkChg chg="add del mod">
+          <ac:chgData name="Kun Suo" userId="41c30799-3a2b-4880-86a3-8488be07954a" providerId="ADAL" clId="{01B90814-4EBE-5562-8795-CE1E7277191D}" dt="2026-06-02T17:30:11.815" v="94"/>
+          <ac:inkMkLst>
+            <pc:docMk/>
+            <pc:sldMk cId="0" sldId="263"/>
+            <ac:inkMk id="19" creationId="{C0BE2950-0F27-08BC-32A7-14A039195CA9}"/>
+          </ac:inkMkLst>
+        </pc:inkChg>
+        <pc:inkChg chg="add del mod">
+          <ac:chgData name="Kun Suo" userId="41c30799-3a2b-4880-86a3-8488be07954a" providerId="ADAL" clId="{01B90814-4EBE-5562-8795-CE1E7277191D}" dt="2026-06-02T17:30:11.813" v="84"/>
+          <ac:inkMkLst>
+            <pc:docMk/>
+            <pc:sldMk cId="0" sldId="263"/>
+            <ac:inkMk id="20" creationId="{A4E47A06-F64D-4FFC-41E0-0C09F222E189}"/>
+          </ac:inkMkLst>
+        </pc:inkChg>
+        <pc:inkChg chg="add del">
+          <ac:chgData name="Kun Suo" userId="41c30799-3a2b-4880-86a3-8488be07954a" providerId="ADAL" clId="{01B90814-4EBE-5562-8795-CE1E7277191D}" dt="2026-06-02T17:30:11.815" v="95"/>
+          <ac:inkMkLst>
+            <pc:docMk/>
+            <pc:sldMk cId="0" sldId="263"/>
+            <ac:inkMk id="23" creationId="{F5124AEA-4ECB-7EE7-FEEC-F69B6C95F3E3}"/>
+          </ac:inkMkLst>
+        </pc:inkChg>
+        <pc:inkChg chg="add del mod">
+          <ac:chgData name="Kun Suo" userId="41c30799-3a2b-4880-86a3-8488be07954a" providerId="ADAL" clId="{01B90814-4EBE-5562-8795-CE1E7277191D}" dt="2026-06-02T17:30:11.811" v="76"/>
+          <ac:inkMkLst>
+            <pc:docMk/>
+            <pc:sldMk cId="0" sldId="263"/>
+            <ac:inkMk id="24" creationId="{C2941C3C-E814-AB6F-26C2-3D08DE59001B}"/>
+          </ac:inkMkLst>
+        </pc:inkChg>
+        <pc:inkChg chg="add del mod">
+          <ac:chgData name="Kun Suo" userId="41c30799-3a2b-4880-86a3-8488be07954a" providerId="ADAL" clId="{01B90814-4EBE-5562-8795-CE1E7277191D}" dt="2026-06-02T17:30:11.814" v="86"/>
+          <ac:inkMkLst>
+            <pc:docMk/>
+            <pc:sldMk cId="0" sldId="263"/>
+            <ac:inkMk id="25" creationId="{BB4594CD-D073-8A42-3C65-A899B48413F2}"/>
+          </ac:inkMkLst>
+        </pc:inkChg>
+        <pc:inkChg chg="add del mod">
+          <ac:chgData name="Kun Suo" userId="41c30799-3a2b-4880-86a3-8488be07954a" providerId="ADAL" clId="{01B90814-4EBE-5562-8795-CE1E7277191D}" dt="2026-06-02T17:30:11.814" v="88"/>
+          <ac:inkMkLst>
+            <pc:docMk/>
+            <pc:sldMk cId="0" sldId="263"/>
+            <ac:inkMk id="28" creationId="{D5ADFBF6-15A3-2BFC-8538-243D5E3B83D8}"/>
+          </ac:inkMkLst>
+        </pc:inkChg>
+        <pc:inkChg chg="add del mod">
+          <ac:chgData name="Kun Suo" userId="41c30799-3a2b-4880-86a3-8488be07954a" providerId="ADAL" clId="{01B90814-4EBE-5562-8795-CE1E7277191D}" dt="2026-06-02T17:30:11.814" v="89"/>
+          <ac:inkMkLst>
+            <pc:docMk/>
+            <pc:sldMk cId="0" sldId="263"/>
+            <ac:inkMk id="31" creationId="{27610A14-26C0-6D34-8052-DB2C301B7DE1}"/>
+          </ac:inkMkLst>
+        </pc:inkChg>
+        <pc:inkChg chg="add del mod">
+          <ac:chgData name="Kun Suo" userId="41c30799-3a2b-4880-86a3-8488be07954a" providerId="ADAL" clId="{01B90814-4EBE-5562-8795-CE1E7277191D}" dt="2026-06-02T17:30:11.812" v="77"/>
+          <ac:inkMkLst>
+            <pc:docMk/>
+            <pc:sldMk cId="0" sldId="263"/>
+            <ac:inkMk id="32" creationId="{886F5CCA-E2F7-D286-257E-324CB5591E04}"/>
+          </ac:inkMkLst>
+        </pc:inkChg>
+        <pc:inkChg chg="add del mod">
+          <ac:chgData name="Kun Suo" userId="41c30799-3a2b-4880-86a3-8488be07954a" providerId="ADAL" clId="{01B90814-4EBE-5562-8795-CE1E7277191D}" dt="2026-06-02T17:30:11.812" v="78"/>
+          <ac:inkMkLst>
+            <pc:docMk/>
+            <pc:sldMk cId="0" sldId="263"/>
+            <ac:inkMk id="35" creationId="{AFAB8F02-108D-F00B-C336-413CA5AD8EAD}"/>
+          </ac:inkMkLst>
+        </pc:inkChg>
+        <pc:inkChg chg="add del mod">
+          <ac:chgData name="Kun Suo" userId="41c30799-3a2b-4880-86a3-8488be07954a" providerId="ADAL" clId="{01B90814-4EBE-5562-8795-CE1E7277191D}" dt="2026-06-02T17:30:11.814" v="90"/>
+          <ac:inkMkLst>
+            <pc:docMk/>
+            <pc:sldMk cId="0" sldId="263"/>
+            <ac:inkMk id="36" creationId="{C9EA3B35-B2CA-3B96-5373-3088168C5614}"/>
+          </ac:inkMkLst>
+        </pc:inkChg>
+        <pc:inkChg chg="add del mod">
+          <ac:chgData name="Kun Suo" userId="41c30799-3a2b-4880-86a3-8488be07954a" providerId="ADAL" clId="{01B90814-4EBE-5562-8795-CE1E7277191D}" dt="2026-06-02T17:30:11.812" v="80"/>
+          <ac:inkMkLst>
+            <pc:docMk/>
+            <pc:sldMk cId="0" sldId="263"/>
+            <ac:inkMk id="39" creationId="{E968647F-2DBE-99C1-023F-1FD711B38FBF}"/>
+          </ac:inkMkLst>
+        </pc:inkChg>
+        <pc:inkChg chg="add del mod">
+          <ac:chgData name="Kun Suo" userId="41c30799-3a2b-4880-86a3-8488be07954a" providerId="ADAL" clId="{01B90814-4EBE-5562-8795-CE1E7277191D}" dt="2026-06-02T17:30:11.815" v="91"/>
+          <ac:inkMkLst>
+            <pc:docMk/>
+            <pc:sldMk cId="0" sldId="263"/>
+            <ac:inkMk id="42" creationId="{E78A8AAC-6913-BF9F-446F-64C64F987786}"/>
+          </ac:inkMkLst>
+        </pc:inkChg>
+        <pc:inkChg chg="add del mod">
+          <ac:chgData name="Kun Suo" userId="41c30799-3a2b-4880-86a3-8488be07954a" providerId="ADAL" clId="{01B90814-4EBE-5562-8795-CE1E7277191D}" dt="2026-06-02T17:30:11.815" v="93"/>
+          <ac:inkMkLst>
+            <pc:docMk/>
+            <pc:sldMk cId="0" sldId="263"/>
+            <ac:inkMk id="43" creationId="{281F0F04-55CC-7FC3-A930-199996874AE3}"/>
+          </ac:inkMkLst>
+        </pc:inkChg>
+        <pc:inkChg chg="add del">
+          <ac:chgData name="Kun Suo" userId="41c30799-3a2b-4880-86a3-8488be07954a" providerId="ADAL" clId="{01B90814-4EBE-5562-8795-CE1E7277191D}" dt="2026-06-02T17:30:11.813" v="82"/>
+          <ac:inkMkLst>
+            <pc:docMk/>
+            <pc:sldMk cId="0" sldId="263"/>
+            <ac:inkMk id="46" creationId="{CC689A4E-5BD6-2FCD-EE08-2798A31EC499}"/>
+          </ac:inkMkLst>
+        </pc:inkChg>
+        <pc:inkChg chg="add del mod">
+          <ac:chgData name="Kun Suo" userId="41c30799-3a2b-4880-86a3-8488be07954a" providerId="ADAL" clId="{01B90814-4EBE-5562-8795-CE1E7277191D}" dt="2026-06-02T17:30:11.812" v="81"/>
+          <ac:inkMkLst>
+            <pc:docMk/>
+            <pc:sldMk cId="0" sldId="263"/>
+            <ac:inkMk id="47" creationId="{1D2BF1CD-44A4-DDFF-5588-A963E087581B}"/>
+          </ac:inkMkLst>
+        </pc:inkChg>
+        <pc:inkChg chg="add del mod">
+          <ac:chgData name="Kun Suo" userId="41c30799-3a2b-4880-86a3-8488be07954a" providerId="ADAL" clId="{01B90814-4EBE-5562-8795-CE1E7277191D}" dt="2026-06-02T17:30:11.812" v="79"/>
+          <ac:inkMkLst>
+            <pc:docMk/>
+            <pc:sldMk cId="0" sldId="263"/>
+            <ac:inkMk id="48" creationId="{635859C1-83EA-9AB4-4D2C-5C3270AF4F25}"/>
+          </ac:inkMkLst>
+        </pc:inkChg>
+        <pc:inkChg chg="add del mod">
+          <ac:chgData name="Kun Suo" userId="41c30799-3a2b-4880-86a3-8488be07954a" providerId="ADAL" clId="{01B90814-4EBE-5562-8795-CE1E7277191D}" dt="2026-06-02T17:30:11.814" v="87"/>
+          <ac:inkMkLst>
+            <pc:docMk/>
+            <pc:sldMk cId="0" sldId="263"/>
+            <ac:inkMk id="51" creationId="{1DECD6C1-357D-8D57-02DA-53F31379F8E2}"/>
+          </ac:inkMkLst>
+        </pc:inkChg>
+      </pc:sldChg>
+      <pc:sldChg chg="addSp delSp modSp mod">
+        <pc:chgData name="Kun Suo" userId="41c30799-3a2b-4880-86a3-8488be07954a" providerId="ADAL" clId="{01B90814-4EBE-5562-8795-CE1E7277191D}" dt="2026-06-02T17:34:36.048" v="145" actId="20577"/>
+        <pc:sldMkLst>
+          <pc:docMk/>
+          <pc:sldMk cId="0" sldId="264"/>
+        </pc:sldMkLst>
+        <pc:spChg chg="mod">
+          <ac:chgData name="Kun Suo" userId="41c30799-3a2b-4880-86a3-8488be07954a" providerId="ADAL" clId="{01B90814-4EBE-5562-8795-CE1E7277191D}" dt="2026-06-02T17:34:36.048" v="145" actId="20577"/>
+          <ac:spMkLst>
+            <pc:docMk/>
+            <pc:sldMk cId="0" sldId="264"/>
+            <ac:spMk id="5" creationId="{00000000-0000-0000-0000-000000000000}"/>
+          </ac:spMkLst>
+        </pc:spChg>
+        <pc:grpChg chg="del mod">
+          <ac:chgData name="Kun Suo" userId="41c30799-3a2b-4880-86a3-8488be07954a" providerId="ADAL" clId="{01B90814-4EBE-5562-8795-CE1E7277191D}" dt="2026-06-02T17:32:02.091" v="103"/>
+          <ac:grpSpMkLst>
+            <pc:docMk/>
+            <pc:sldMk cId="0" sldId="264"/>
+            <ac:grpSpMk id="14" creationId="{08B0F28E-C77A-B36D-3D6C-5B7BD9E2E131}"/>
+          </ac:grpSpMkLst>
+        </pc:grpChg>
+        <pc:grpChg chg="del mod">
+          <ac:chgData name="Kun Suo" userId="41c30799-3a2b-4880-86a3-8488be07954a" providerId="ADAL" clId="{01B90814-4EBE-5562-8795-CE1E7277191D}" dt="2026-06-02T17:32:03.876" v="105"/>
+          <ac:grpSpMkLst>
+            <pc:docMk/>
+            <pc:sldMk cId="0" sldId="264"/>
+            <ac:grpSpMk id="15" creationId="{C7C5F06C-A28B-27CB-D45A-94F3C018CED6}"/>
+          </ac:grpSpMkLst>
+        </pc:grpChg>
+        <pc:grpChg chg="del mod">
+          <ac:chgData name="Kun Suo" userId="41c30799-3a2b-4880-86a3-8488be07954a" providerId="ADAL" clId="{01B90814-4EBE-5562-8795-CE1E7277191D}" dt="2026-06-02T17:32:03.876" v="105"/>
+          <ac:grpSpMkLst>
+            <pc:docMk/>
+            <pc:sldMk cId="0" sldId="264"/>
+            <ac:grpSpMk id="17" creationId="{B83605E7-4961-A38B-C062-CB5BF1A12034}"/>
+          </ac:grpSpMkLst>
+        </pc:grpChg>
+        <pc:grpChg chg="del mod">
+          <ac:chgData name="Kun Suo" userId="41c30799-3a2b-4880-86a3-8488be07954a" providerId="ADAL" clId="{01B90814-4EBE-5562-8795-CE1E7277191D}" dt="2026-06-02T17:32:07.517" v="107"/>
+          <ac:grpSpMkLst>
+            <pc:docMk/>
+            <pc:sldMk cId="0" sldId="264"/>
+            <ac:grpSpMk id="18" creationId="{C1F257B6-ECCE-024E-A495-E26B7714472E}"/>
+          </ac:grpSpMkLst>
+        </pc:grpChg>
+        <pc:grpChg chg="del mod">
+          <ac:chgData name="Kun Suo" userId="41c30799-3a2b-4880-86a3-8488be07954a" providerId="ADAL" clId="{01B90814-4EBE-5562-8795-CE1E7277191D}" dt="2026-06-02T17:32:07.517" v="107"/>
+          <ac:grpSpMkLst>
+            <pc:docMk/>
+            <pc:sldMk cId="0" sldId="264"/>
+            <ac:grpSpMk id="20" creationId="{ACB9DDD1-0257-7908-5C66-ABA5E070F02F}"/>
+          </ac:grpSpMkLst>
+        </pc:grpChg>
+        <pc:grpChg chg="del mod">
+          <ac:chgData name="Kun Suo" userId="41c30799-3a2b-4880-86a3-8488be07954a" providerId="ADAL" clId="{01B90814-4EBE-5562-8795-CE1E7277191D}" dt="2026-06-02T17:32:09.245" v="109"/>
+          <ac:grpSpMkLst>
+            <pc:docMk/>
+            <pc:sldMk cId="0" sldId="264"/>
+            <ac:grpSpMk id="21" creationId="{1353C9CB-F49F-43E7-52EF-49CD993F8567}"/>
+          </ac:grpSpMkLst>
+        </pc:grpChg>
+        <pc:grpChg chg="del mod">
+          <ac:chgData name="Kun Suo" userId="41c30799-3a2b-4880-86a3-8488be07954a" providerId="ADAL" clId="{01B90814-4EBE-5562-8795-CE1E7277191D}" dt="2026-06-02T17:32:09.245" v="109"/>
+          <ac:grpSpMkLst>
+            <pc:docMk/>
+            <pc:sldMk cId="0" sldId="264"/>
+            <ac:grpSpMk id="23" creationId="{789B4476-DA97-D5C9-78CD-11109262BA26}"/>
+          </ac:grpSpMkLst>
+        </pc:grpChg>
+        <pc:grpChg chg="del mod">
+          <ac:chgData name="Kun Suo" userId="41c30799-3a2b-4880-86a3-8488be07954a" providerId="ADAL" clId="{01B90814-4EBE-5562-8795-CE1E7277191D}" dt="2026-06-02T17:32:11.874" v="111"/>
+          <ac:grpSpMkLst>
+            <pc:docMk/>
+            <pc:sldMk cId="0" sldId="264"/>
+            <ac:grpSpMk id="24" creationId="{644C1CD2-97CD-BC52-4E15-02E0AFB8701B}"/>
+          </ac:grpSpMkLst>
+        </pc:grpChg>
+        <pc:grpChg chg="del mod">
+          <ac:chgData name="Kun Suo" userId="41c30799-3a2b-4880-86a3-8488be07954a" providerId="ADAL" clId="{01B90814-4EBE-5562-8795-CE1E7277191D}" dt="2026-06-02T17:32:11.874" v="111"/>
+          <ac:grpSpMkLst>
+            <pc:docMk/>
+            <pc:sldMk cId="0" sldId="264"/>
+            <ac:grpSpMk id="26" creationId="{B8ECAD3D-BF58-C330-0E45-18197D888CB6}"/>
+          </ac:grpSpMkLst>
+        </pc:grpChg>
+        <pc:grpChg chg="del mod">
+          <ac:chgData name="Kun Suo" userId="41c30799-3a2b-4880-86a3-8488be07954a" providerId="ADAL" clId="{01B90814-4EBE-5562-8795-CE1E7277191D}" dt="2026-06-02T17:32:31.807" v="123"/>
+          <ac:grpSpMkLst>
+            <pc:docMk/>
+            <pc:sldMk cId="0" sldId="264"/>
+            <ac:grpSpMk id="27" creationId="{9C3013AD-6ABA-E392-3215-DDD5961CAC94}"/>
+          </ac:grpSpMkLst>
+        </pc:grpChg>
+        <pc:grpChg chg="del mod">
+          <ac:chgData name="Kun Suo" userId="41c30799-3a2b-4880-86a3-8488be07954a" providerId="ADAL" clId="{01B90814-4EBE-5562-8795-CE1E7277191D}" dt="2026-06-02T17:32:22.877" v="115"/>
+          <ac:grpSpMkLst>
+            <pc:docMk/>
+            <pc:sldMk cId="0" sldId="264"/>
+            <ac:grpSpMk id="31" creationId="{E8C6FA0C-8CD8-83EF-62FB-E7198E0C5EBE}"/>
+          </ac:grpSpMkLst>
+        </pc:grpChg>
+        <pc:grpChg chg="del mod">
+          <ac:chgData name="Kun Suo" userId="41c30799-3a2b-4880-86a3-8488be07954a" providerId="ADAL" clId="{01B90814-4EBE-5562-8795-CE1E7277191D}" dt="2026-06-02T17:32:24.215" v="117"/>
+          <ac:grpSpMkLst>
+            <pc:docMk/>
+            <pc:sldMk cId="0" sldId="264"/>
+            <ac:grpSpMk id="32" creationId="{E27B5E6B-D2E9-7B52-2F80-DE2D5BABD572}"/>
+          </ac:grpSpMkLst>
+        </pc:grpChg>
+        <pc:grpChg chg="del mod">
+          <ac:chgData name="Kun Suo" userId="41c30799-3a2b-4880-86a3-8488be07954a" providerId="ADAL" clId="{01B90814-4EBE-5562-8795-CE1E7277191D}" dt="2026-06-02T17:32:24.215" v="117"/>
+          <ac:grpSpMkLst>
+            <pc:docMk/>
+            <pc:sldMk cId="0" sldId="264"/>
+            <ac:grpSpMk id="34" creationId="{2ED1CEEA-6982-BD2E-7556-A441D90BFC5C}"/>
+          </ac:grpSpMkLst>
+        </pc:grpChg>
+        <pc:grpChg chg="del mod">
+          <ac:chgData name="Kun Suo" userId="41c30799-3a2b-4880-86a3-8488be07954a" providerId="ADAL" clId="{01B90814-4EBE-5562-8795-CE1E7277191D}" dt="2026-06-02T17:32:27.274" v="119"/>
+          <ac:grpSpMkLst>
+            <pc:docMk/>
+            <pc:sldMk cId="0" sldId="264"/>
+            <ac:grpSpMk id="35" creationId="{7624845B-29BF-8352-6704-D8B59EDA834D}"/>
+          </ac:grpSpMkLst>
+        </pc:grpChg>
+        <pc:grpChg chg="del mod">
+          <ac:chgData name="Kun Suo" userId="41c30799-3a2b-4880-86a3-8488be07954a" providerId="ADAL" clId="{01B90814-4EBE-5562-8795-CE1E7277191D}" dt="2026-06-02T17:32:27.274" v="119"/>
+          <ac:grpSpMkLst>
+            <pc:docMk/>
+            <pc:sldMk cId="0" sldId="264"/>
+            <ac:grpSpMk id="37" creationId="{15B79B5D-7EA8-E218-3B92-B3B6BAB122C4}"/>
+          </ac:grpSpMkLst>
+        </pc:grpChg>
+        <pc:grpChg chg="del mod">
+          <ac:chgData name="Kun Suo" userId="41c30799-3a2b-4880-86a3-8488be07954a" providerId="ADAL" clId="{01B90814-4EBE-5562-8795-CE1E7277191D}" dt="2026-06-02T17:32:29.426" v="121"/>
+          <ac:grpSpMkLst>
+            <pc:docMk/>
+            <pc:sldMk cId="0" sldId="264"/>
+            <ac:grpSpMk id="38" creationId="{D33D82EA-34B2-4DF1-F752-9355B5FFC245}"/>
+          </ac:grpSpMkLst>
+        </pc:grpChg>
+        <pc:grpChg chg="del mod">
+          <ac:chgData name="Kun Suo" userId="41c30799-3a2b-4880-86a3-8488be07954a" providerId="ADAL" clId="{01B90814-4EBE-5562-8795-CE1E7277191D}" dt="2026-06-02T17:32:29.426" v="121"/>
+          <ac:grpSpMkLst>
+            <pc:docMk/>
+            <pc:sldMk cId="0" sldId="264"/>
+            <ac:grpSpMk id="40" creationId="{0B37ED16-28A2-EAEC-ECA4-D67F09D3B6AE}"/>
+          </ac:grpSpMkLst>
+        </pc:grpChg>
+        <pc:grpChg chg="del mod">
+          <ac:chgData name="Kun Suo" userId="41c30799-3a2b-4880-86a3-8488be07954a" providerId="ADAL" clId="{01B90814-4EBE-5562-8795-CE1E7277191D}" dt="2026-06-02T17:32:33.568" v="125"/>
+          <ac:grpSpMkLst>
+            <pc:docMk/>
+            <pc:sldMk cId="0" sldId="264"/>
+            <ac:grpSpMk id="41" creationId="{1F1B6862-23B5-0F2C-C75B-0163C20F25AD}"/>
+          </ac:grpSpMkLst>
+        </pc:grpChg>
+        <pc:grpChg chg="del mod">
+          <ac:chgData name="Kun Suo" userId="41c30799-3a2b-4880-86a3-8488be07954a" providerId="ADAL" clId="{01B90814-4EBE-5562-8795-CE1E7277191D}" dt="2026-06-02T17:32:31.807" v="123"/>
+          <ac:grpSpMkLst>
+            <pc:docMk/>
+            <pc:sldMk cId="0" sldId="264"/>
+            <ac:grpSpMk id="43" creationId="{585831F6-0C81-A47F-23D5-B9CC7C9FF434}"/>
+          </ac:grpSpMkLst>
+        </pc:grpChg>
+        <pc:grpChg chg="del mod">
+          <ac:chgData name="Kun Suo" userId="41c30799-3a2b-4880-86a3-8488be07954a" providerId="ADAL" clId="{01B90814-4EBE-5562-8795-CE1E7277191D}" dt="2026-06-02T17:32:33.568" v="125"/>
+          <ac:grpSpMkLst>
+            <pc:docMk/>
+            <pc:sldMk cId="0" sldId="264"/>
+            <ac:grpSpMk id="44" creationId="{8F5FA0E8-4790-46C9-81FF-15FCBC4702C6}"/>
+          </ac:grpSpMkLst>
+        </pc:grpChg>
+        <pc:grpChg chg="del mod">
+          <ac:chgData name="Kun Suo" userId="41c30799-3a2b-4880-86a3-8488be07954a" providerId="ADAL" clId="{01B90814-4EBE-5562-8795-CE1E7277191D}" dt="2026-06-02T17:32:33.568" v="125"/>
+          <ac:grpSpMkLst>
+            <pc:docMk/>
+            <pc:sldMk cId="0" sldId="264"/>
+            <ac:grpSpMk id="46" creationId="{72F2D4EB-5E3F-A8C9-99A1-0C75D535ADF1}"/>
+          </ac:grpSpMkLst>
+        </pc:grpChg>
+        <pc:grpChg chg="del mod">
+          <ac:chgData name="Kun Suo" userId="41c30799-3a2b-4880-86a3-8488be07954a" providerId="ADAL" clId="{01B90814-4EBE-5562-8795-CE1E7277191D}" dt="2026-06-02T17:32:59.007" v="143"/>
+          <ac:grpSpMkLst>
+            <pc:docMk/>
+            <pc:sldMk cId="0" sldId="264"/>
+            <ac:grpSpMk id="47" creationId="{8909CC43-EF41-4DA0-603E-FAC8D747AD11}"/>
+          </ac:grpSpMkLst>
+        </pc:grpChg>
+        <pc:inkChg chg="add del">
+          <ac:chgData name="Kun Suo" userId="41c30799-3a2b-4880-86a3-8488be07954a" providerId="ADAL" clId="{01B90814-4EBE-5562-8795-CE1E7277191D}" dt="2026-06-02T17:32:59.005" v="134"/>
+          <ac:inkMkLst>
+            <pc:docMk/>
+            <pc:sldMk cId="0" sldId="264"/>
+            <ac:inkMk id="7" creationId="{233FDB28-C13D-D555-C05A-D879B81C755E}"/>
+          </ac:inkMkLst>
+        </pc:inkChg>
+        <pc:inkChg chg="add del mod">
+          <ac:chgData name="Kun Suo" userId="41c30799-3a2b-4880-86a3-8488be07954a" providerId="ADAL" clId="{01B90814-4EBE-5562-8795-CE1E7277191D}" dt="2026-06-02T17:32:59.005" v="132"/>
+          <ac:inkMkLst>
+            <pc:docMk/>
+            <pc:sldMk cId="0" sldId="264"/>
+            <ac:inkMk id="8" creationId="{789BCA6C-291A-DB4E-947F-D35418A6683F}"/>
+          </ac:inkMkLst>
+        </pc:inkChg>
+        <pc:inkChg chg="add del mod">
+          <ac:chgData name="Kun Suo" userId="41c30799-3a2b-4880-86a3-8488be07954a" providerId="ADAL" clId="{01B90814-4EBE-5562-8795-CE1E7277191D}" dt="2026-06-02T17:32:59.004" v="129"/>
+          <ac:inkMkLst>
+            <pc:docMk/>
+            <pc:sldMk cId="0" sldId="264"/>
+            <ac:inkMk id="9" creationId="{1CD1771A-3B61-3265-638E-23E60ADDFEEB}"/>
+          </ac:inkMkLst>
+        </pc:inkChg>
+        <pc:inkChg chg="add del mod">
+          <ac:chgData name="Kun Suo" userId="41c30799-3a2b-4880-86a3-8488be07954a" providerId="ADAL" clId="{01B90814-4EBE-5562-8795-CE1E7277191D}" dt="2026-06-02T17:32:59.007" v="143"/>
+          <ac:inkMkLst>
+            <pc:docMk/>
+            <pc:sldMk cId="0" sldId="264"/>
+            <ac:inkMk id="10" creationId="{8ADD574A-A737-2BDB-70F0-1A34B9CE77D9}"/>
+          </ac:inkMkLst>
+        </pc:inkChg>
+        <pc:inkChg chg="add del mod">
+          <ac:chgData name="Kun Suo" userId="41c30799-3a2b-4880-86a3-8488be07954a" providerId="ADAL" clId="{01B90814-4EBE-5562-8795-CE1E7277191D}" dt="2026-06-02T17:32:59.006" v="137"/>
+          <ac:inkMkLst>
+            <pc:docMk/>
+            <pc:sldMk cId="0" sldId="264"/>
+            <ac:inkMk id="11" creationId="{852B5289-ED98-4265-3C64-CC8D26A7F958}"/>
+          </ac:inkMkLst>
+        </pc:inkChg>
+        <pc:inkChg chg="add del mod">
+          <ac:chgData name="Kun Suo" userId="41c30799-3a2b-4880-86a3-8488be07954a" providerId="ADAL" clId="{01B90814-4EBE-5562-8795-CE1E7277191D}" dt="2026-06-02T17:32:59.003" v="126"/>
+          <ac:inkMkLst>
+            <pc:docMk/>
+            <pc:sldMk cId="0" sldId="264"/>
+            <ac:inkMk id="12" creationId="{896A7BB9-96FC-244D-45EA-6F9EFF309653}"/>
+          </ac:inkMkLst>
+        </pc:inkChg>
+        <pc:inkChg chg="add del mod">
+          <ac:chgData name="Kun Suo" userId="41c30799-3a2b-4880-86a3-8488be07954a" providerId="ADAL" clId="{01B90814-4EBE-5562-8795-CE1E7277191D}" dt="2026-06-02T17:32:59.007" v="142"/>
+          <ac:inkMkLst>
+            <pc:docMk/>
+            <pc:sldMk cId="0" sldId="264"/>
+            <ac:inkMk id="13" creationId="{B1B2950B-61AC-BA92-4C84-033BA2D28225}"/>
+          </ac:inkMkLst>
+        </pc:inkChg>
+        <pc:inkChg chg="add mod">
+          <ac:chgData name="Kun Suo" userId="41c30799-3a2b-4880-86a3-8488be07954a" providerId="ADAL" clId="{01B90814-4EBE-5562-8795-CE1E7277191D}" dt="2026-06-02T17:32:03.876" v="105"/>
+          <ac:inkMkLst>
+            <pc:docMk/>
+            <pc:sldMk cId="0" sldId="264"/>
+            <ac:inkMk id="16" creationId="{320E6EDB-5FCC-A648-62FF-78F46A0BC991}"/>
+          </ac:inkMkLst>
+        </pc:inkChg>
+        <pc:inkChg chg="add del mod">
+          <ac:chgData name="Kun Suo" userId="41c30799-3a2b-4880-86a3-8488be07954a" providerId="ADAL" clId="{01B90814-4EBE-5562-8795-CE1E7277191D}" dt="2026-06-02T17:32:59.005" v="135"/>
+          <ac:inkMkLst>
+            <pc:docMk/>
+            <pc:sldMk cId="0" sldId="264"/>
+            <ac:inkMk id="19" creationId="{8FFEC5F9-669A-596D-0D27-DBA4EB4AC417}"/>
+          </ac:inkMkLst>
+        </pc:inkChg>
+        <pc:inkChg chg="add del mod">
+          <ac:chgData name="Kun Suo" userId="41c30799-3a2b-4880-86a3-8488be07954a" providerId="ADAL" clId="{01B90814-4EBE-5562-8795-CE1E7277191D}" dt="2026-06-02T17:32:59.004" v="130"/>
+          <ac:inkMkLst>
+            <pc:docMk/>
+            <pc:sldMk cId="0" sldId="264"/>
+            <ac:inkMk id="22" creationId="{279ADBAF-F412-5F13-549C-3B3E49E8A762}"/>
+          </ac:inkMkLst>
+        </pc:inkChg>
+        <pc:inkChg chg="add del mod">
+          <ac:chgData name="Kun Suo" userId="41c30799-3a2b-4880-86a3-8488be07954a" providerId="ADAL" clId="{01B90814-4EBE-5562-8795-CE1E7277191D}" dt="2026-06-02T17:32:59.006" v="138"/>
+          <ac:inkMkLst>
+            <pc:docMk/>
+            <pc:sldMk cId="0" sldId="264"/>
+            <ac:inkMk id="25" creationId="{E4526044-AB74-6A6F-D850-84F05DF53F76}"/>
+          </ac:inkMkLst>
+        </pc:inkChg>
+        <pc:inkChg chg="add del">
+          <ac:chgData name="Kun Suo" userId="41c30799-3a2b-4880-86a3-8488be07954a" providerId="ADAL" clId="{01B90814-4EBE-5562-8795-CE1E7277191D}" dt="2026-06-02T17:32:59.005" v="131"/>
+          <ac:inkMkLst>
+            <pc:docMk/>
+            <pc:sldMk cId="0" sldId="264"/>
+            <ac:inkMk id="28" creationId="{F6B78C3C-3F03-3EBA-D687-8E8FC7F03EEB}"/>
+          </ac:inkMkLst>
+        </pc:inkChg>
+        <pc:inkChg chg="add del mod">
+          <ac:chgData name="Kun Suo" userId="41c30799-3a2b-4880-86a3-8488be07954a" providerId="ADAL" clId="{01B90814-4EBE-5562-8795-CE1E7277191D}" dt="2026-06-02T17:32:59.006" v="140"/>
+          <ac:inkMkLst>
+            <pc:docMk/>
+            <pc:sldMk cId="0" sldId="264"/>
+            <ac:inkMk id="29" creationId="{4888A3E9-61D7-0FDF-084B-7E71FDD1F7DA}"/>
+          </ac:inkMkLst>
+        </pc:inkChg>
+        <pc:inkChg chg="add del mod">
+          <ac:chgData name="Kun Suo" userId="41c30799-3a2b-4880-86a3-8488be07954a" providerId="ADAL" clId="{01B90814-4EBE-5562-8795-CE1E7277191D}" dt="2026-06-02T17:32:59.007" v="144"/>
+          <ac:inkMkLst>
+            <pc:docMk/>
+            <pc:sldMk cId="0" sldId="264"/>
+            <ac:inkMk id="30" creationId="{E8DB8F1B-08CA-8BA0-6BED-579B19B93E5D}"/>
+          </ac:inkMkLst>
+        </pc:inkChg>
+        <pc:inkChg chg="add del mod">
+          <ac:chgData name="Kun Suo" userId="41c30799-3a2b-4880-86a3-8488be07954a" providerId="ADAL" clId="{01B90814-4EBE-5562-8795-CE1E7277191D}" dt="2026-06-02T17:32:59.006" v="139"/>
+          <ac:inkMkLst>
+            <pc:docMk/>
+            <pc:sldMk cId="0" sldId="264"/>
+            <ac:inkMk id="33" creationId="{5CC25EC9-C92D-AB55-17A0-2357C92CF8EC}"/>
+          </ac:inkMkLst>
+        </pc:inkChg>
+        <pc:inkChg chg="add mod">
+          <ac:chgData name="Kun Suo" userId="41c30799-3a2b-4880-86a3-8488be07954a" providerId="ADAL" clId="{01B90814-4EBE-5562-8795-CE1E7277191D}" dt="2026-06-02T17:32:29.426" v="121"/>
+          <ac:inkMkLst>
+            <pc:docMk/>
+            <pc:sldMk cId="0" sldId="264"/>
+            <ac:inkMk id="36" creationId="{4BCEDA39-47D7-9F4A-2F28-612877AF542A}"/>
+          </ac:inkMkLst>
+        </pc:inkChg>
+        <pc:inkChg chg="add mod">
+          <ac:chgData name="Kun Suo" userId="41c30799-3a2b-4880-86a3-8488be07954a" providerId="ADAL" clId="{01B90814-4EBE-5562-8795-CE1E7277191D}" dt="2026-06-02T17:32:29.426" v="121"/>
+          <ac:inkMkLst>
+            <pc:docMk/>
+            <pc:sldMk cId="0" sldId="264"/>
+            <ac:inkMk id="39" creationId="{E2E091D8-5D0F-7E92-3079-9ED13E2A6702}"/>
+          </ac:inkMkLst>
+        </pc:inkChg>
+        <pc:inkChg chg="add del mod">
+          <ac:chgData name="Kun Suo" userId="41c30799-3a2b-4880-86a3-8488be07954a" providerId="ADAL" clId="{01B90814-4EBE-5562-8795-CE1E7277191D}" dt="2026-06-02T17:32:59.007" v="141"/>
+          <ac:inkMkLst>
+            <pc:docMk/>
+            <pc:sldMk cId="0" sldId="264"/>
+            <ac:inkMk id="42" creationId="{1775B855-B67C-C4FD-678E-7616A89A72EC}"/>
+          </ac:inkMkLst>
+        </pc:inkChg>
+        <pc:inkChg chg="add del mod">
+          <ac:chgData name="Kun Suo" userId="41c30799-3a2b-4880-86a3-8488be07954a" providerId="ADAL" clId="{01B90814-4EBE-5562-8795-CE1E7277191D}" dt="2026-06-02T17:32:59.006" v="136"/>
+          <ac:inkMkLst>
+            <pc:docMk/>
+            <pc:sldMk cId="0" sldId="264"/>
+            <ac:inkMk id="45" creationId="{D5289C09-8120-912B-7F80-66DD9225127D}"/>
+          </ac:inkMkLst>
+        </pc:inkChg>
+      </pc:sldChg>
+      <pc:sldChg chg="addSp delSp modSp mod">
+        <pc:chgData name="Kun Suo" userId="41c30799-3a2b-4880-86a3-8488be07954a" providerId="ADAL" clId="{01B90814-4EBE-5562-8795-CE1E7277191D}" dt="2026-06-02T17:37:02.066" v="203"/>
+        <pc:sldMkLst>
+          <pc:docMk/>
+          <pc:sldMk cId="0" sldId="265"/>
+        </pc:sldMkLst>
+        <pc:grpChg chg="del mod">
+          <ac:chgData name="Kun Suo" userId="41c30799-3a2b-4880-86a3-8488be07954a" providerId="ADAL" clId="{01B90814-4EBE-5562-8795-CE1E7277191D}" dt="2026-06-02T17:35:19.174" v="148"/>
+          <ac:grpSpMkLst>
+            <pc:docMk/>
+            <pc:sldMk cId="0" sldId="265"/>
+            <ac:grpSpMk id="9" creationId="{D56307D0-6D73-213D-B00A-CCFFF0E40BBA}"/>
+          </ac:grpSpMkLst>
+        </pc:grpChg>
+        <pc:grpChg chg="del mod">
+          <ac:chgData name="Kun Suo" userId="41c30799-3a2b-4880-86a3-8488be07954a" providerId="ADAL" clId="{01B90814-4EBE-5562-8795-CE1E7277191D}" dt="2026-06-02T17:35:20.232" v="150"/>
+          <ac:grpSpMkLst>
+            <pc:docMk/>
+            <pc:sldMk cId="0" sldId="265"/>
+            <ac:grpSpMk id="10" creationId="{C1D217BE-5CE1-AF77-7019-B68BB946A86E}"/>
+          </ac:grpSpMkLst>
+        </pc:grpChg>
+        <pc:grpChg chg="del mod">
+          <ac:chgData name="Kun Suo" userId="41c30799-3a2b-4880-86a3-8488be07954a" providerId="ADAL" clId="{01B90814-4EBE-5562-8795-CE1E7277191D}" dt="2026-06-02T17:35:20.232" v="150"/>
+          <ac:grpSpMkLst>
+            <pc:docMk/>
+            <pc:sldMk cId="0" sldId="265"/>
+            <ac:grpSpMk id="12" creationId="{194166A7-4409-5365-9D88-AC5BFB79EED4}"/>
+          </ac:grpSpMkLst>
+        </pc:grpChg>
+        <pc:grpChg chg="del mod">
+          <ac:chgData name="Kun Suo" userId="41c30799-3a2b-4880-86a3-8488be07954a" providerId="ADAL" clId="{01B90814-4EBE-5562-8795-CE1E7277191D}" dt="2026-06-02T17:35:24.409" v="154"/>
+          <ac:grpSpMkLst>
+            <pc:docMk/>
+            <pc:sldMk cId="0" sldId="265"/>
+            <ac:grpSpMk id="13" creationId="{F0FC2CB4-5363-BC5E-AD92-874F9A389F0B}"/>
+          </ac:grpSpMkLst>
+        </pc:grpChg>
+        <pc:grpChg chg="del mod">
+          <ac:chgData name="Kun Suo" userId="41c30799-3a2b-4880-86a3-8488be07954a" providerId="ADAL" clId="{01B90814-4EBE-5562-8795-CE1E7277191D}" dt="2026-06-02T17:35:24.409" v="154"/>
+          <ac:grpSpMkLst>
+            <pc:docMk/>
+            <pc:sldMk cId="0" sldId="265"/>
+            <ac:grpSpMk id="17" creationId="{DAB573B9-C3BF-42DB-6D67-3DFC032EE496}"/>
+          </ac:grpSpMkLst>
+        </pc:grpChg>
+        <pc:grpChg chg="del mod">
+          <ac:chgData name="Kun Suo" userId="41c30799-3a2b-4880-86a3-8488be07954a" providerId="ADAL" clId="{01B90814-4EBE-5562-8795-CE1E7277191D}" dt="2026-06-02T17:36:22.230" v="187"/>
+          <ac:grpSpMkLst>
+            <pc:docMk/>
+            <pc:sldMk cId="0" sldId="265"/>
+            <ac:grpSpMk id="18" creationId="{556FD2F3-B84E-B1E8-DE9A-9D5A9AF10A02}"/>
+          </ac:grpSpMkLst>
+        </pc:grpChg>
+        <pc:grpChg chg="del mod">
+          <ac:chgData name="Kun Suo" userId="41c30799-3a2b-4880-86a3-8488be07954a" providerId="ADAL" clId="{01B90814-4EBE-5562-8795-CE1E7277191D}" dt="2026-06-02T17:35:27.173" v="157"/>
+          <ac:grpSpMkLst>
+            <pc:docMk/>
+            <pc:sldMk cId="0" sldId="265"/>
+            <ac:grpSpMk id="21" creationId="{312DC14F-AEB7-F7D4-2110-F1216287F169}"/>
+          </ac:grpSpMkLst>
+        </pc:grpChg>
+        <pc:grpChg chg="del mod">
+          <ac:chgData name="Kun Suo" userId="41c30799-3a2b-4880-86a3-8488be07954a" providerId="ADAL" clId="{01B90814-4EBE-5562-8795-CE1E7277191D}" dt="2026-06-02T17:35:28.665" v="159"/>
+          <ac:grpSpMkLst>
+            <pc:docMk/>
+            <pc:sldMk cId="0" sldId="265"/>
+            <ac:grpSpMk id="22" creationId="{9D85518D-5C44-4775-75D9-A4D3FD70A004}"/>
+          </ac:grpSpMkLst>
+        </pc:grpChg>
+        <pc:grpChg chg="del mod">
+          <ac:chgData name="Kun Suo" userId="41c30799-3a2b-4880-86a3-8488be07954a" providerId="ADAL" clId="{01B90814-4EBE-5562-8795-CE1E7277191D}" dt="2026-06-02T17:35:28.665" v="159"/>
+          <ac:grpSpMkLst>
+            <pc:docMk/>
+            <pc:sldMk cId="0" sldId="265"/>
+            <ac:grpSpMk id="24" creationId="{5B730110-D695-9FAB-4E6B-0FC444AC8CBD}"/>
+          </ac:grpSpMkLst>
+        </pc:grpChg>
+        <pc:grpChg chg="del mod">
+          <ac:chgData name="Kun Suo" userId="41c30799-3a2b-4880-86a3-8488be07954a" providerId="ADAL" clId="{01B90814-4EBE-5562-8795-CE1E7277191D}" dt="2026-06-02T17:35:30.597" v="161"/>
+          <ac:grpSpMkLst>
+            <pc:docMk/>
+            <pc:sldMk cId="0" sldId="265"/>
+            <ac:grpSpMk id="25" creationId="{3B665125-EEBA-6D68-9C58-96F758B66CD8}"/>
+          </ac:grpSpMkLst>
+        </pc:grpChg>
+        <pc:grpChg chg="del mod">
+          <ac:chgData name="Kun Suo" userId="41c30799-3a2b-4880-86a3-8488be07954a" providerId="ADAL" clId="{01B90814-4EBE-5562-8795-CE1E7277191D}" dt="2026-06-02T17:35:30.597" v="161"/>
+          <ac:grpSpMkLst>
+            <pc:docMk/>
+            <pc:sldMk cId="0" sldId="265"/>
+            <ac:grpSpMk id="27" creationId="{5F0A02CC-0443-EDB4-CA68-CBAA27CA58DF}"/>
+          </ac:grpSpMkLst>
+        </pc:grpChg>
+        <pc:grpChg chg="del mod">
+          <ac:chgData name="Kun Suo" userId="41c30799-3a2b-4880-86a3-8488be07954a" providerId="ADAL" clId="{01B90814-4EBE-5562-8795-CE1E7277191D}" dt="2026-06-02T17:36:22.231" v="189"/>
+          <ac:grpSpMkLst>
+            <pc:docMk/>
+            <pc:sldMk cId="0" sldId="265"/>
+            <ac:grpSpMk id="28" creationId="{2A18343C-07D6-AE2F-CF7C-D9D772052190}"/>
+          </ac:grpSpMkLst>
+        </pc:grpChg>
+        <pc:grpChg chg="del mod">
+          <ac:chgData name="Kun Suo" userId="41c30799-3a2b-4880-86a3-8488be07954a" providerId="ADAL" clId="{01B90814-4EBE-5562-8795-CE1E7277191D}" dt="2026-06-02T17:35:37.305" v="165"/>
+          <ac:grpSpMkLst>
+            <pc:docMk/>
+            <pc:sldMk cId="0" sldId="265"/>
+            <ac:grpSpMk id="32" creationId="{28415532-7588-88AD-BBB0-B6CA7DB8ED84}"/>
+          </ac:grpSpMkLst>
+        </pc:grpChg>
+        <pc:grpChg chg="del mod">
+          <ac:chgData name="Kun Suo" userId="41c30799-3a2b-4880-86a3-8488be07954a" providerId="ADAL" clId="{01B90814-4EBE-5562-8795-CE1E7277191D}" dt="2026-06-02T17:35:48.203" v="173"/>
+          <ac:grpSpMkLst>
+            <pc:docMk/>
+            <pc:sldMk cId="0" sldId="265"/>
+            <ac:grpSpMk id="33" creationId="{C5CF384A-E632-E263-69AF-46A40055455D}"/>
+          </ac:grpSpMkLst>
+        </pc:grpChg>
+        <pc:grpChg chg="del mod">
+          <ac:chgData name="Kun Suo" userId="41c30799-3a2b-4880-86a3-8488be07954a" providerId="ADAL" clId="{01B90814-4EBE-5562-8795-CE1E7277191D}" dt="2026-06-02T17:35:48.203" v="173"/>
+          <ac:grpSpMkLst>
+            <pc:docMk/>
+            <pc:sldMk cId="0" sldId="265"/>
+            <ac:grpSpMk id="41" creationId="{BA7D329E-D651-7DA4-0268-B68F6295E887}"/>
+          </ac:grpSpMkLst>
+        </pc:grpChg>
+        <pc:grpChg chg="del mod">
+          <ac:chgData name="Kun Suo" userId="41c30799-3a2b-4880-86a3-8488be07954a" providerId="ADAL" clId="{01B90814-4EBE-5562-8795-CE1E7277191D}" dt="2026-06-02T17:36:22.230" v="185"/>
+          <ac:grpSpMkLst>
+            <pc:docMk/>
+            <pc:sldMk cId="0" sldId="265"/>
+            <ac:grpSpMk id="42" creationId="{C19E0FE1-49A6-E6AA-14C5-8C20C413D9AF}"/>
+          </ac:grpSpMkLst>
+        </pc:grpChg>
+        <pc:grpChg chg="del mod">
+          <ac:chgData name="Kun Suo" userId="41c30799-3a2b-4880-86a3-8488be07954a" providerId="ADAL" clId="{01B90814-4EBE-5562-8795-CE1E7277191D}" dt="2026-06-02T17:35:48.203" v="173"/>
+          <ac:grpSpMkLst>
+            <pc:docMk/>
+            <pc:sldMk cId="0" sldId="265"/>
+            <ac:grpSpMk id="43" creationId="{A82035DD-AA76-9596-364A-01F91F89BC57}"/>
+          </ac:grpSpMkLst>
+        </pc:grpChg>
+        <pc:grpChg chg="del mod">
+          <ac:chgData name="Kun Suo" userId="41c30799-3a2b-4880-86a3-8488be07954a" providerId="ADAL" clId="{01B90814-4EBE-5562-8795-CE1E7277191D}" dt="2026-06-02T17:36:22.231" v="190"/>
+          <ac:grpSpMkLst>
+            <pc:docMk/>
+            <pc:sldMk cId="0" sldId="265"/>
+            <ac:grpSpMk id="44" creationId="{716AF98A-06B9-D1DC-3D23-84E690173DE4}"/>
+          </ac:grpSpMkLst>
+        </pc:grpChg>
+        <pc:grpChg chg="del mod">
+          <ac:chgData name="Kun Suo" userId="41c30799-3a2b-4880-86a3-8488be07954a" providerId="ADAL" clId="{01B90814-4EBE-5562-8795-CE1E7277191D}" dt="2026-06-02T17:36:38.580" v="196"/>
+          <ac:grpSpMkLst>
+            <pc:docMk/>
+            <pc:sldMk cId="0" sldId="265"/>
+            <ac:grpSpMk id="47" creationId="{D14007FC-F3A6-4F0E-8963-4E322E3BD2AE}"/>
+          </ac:grpSpMkLst>
+        </pc:grpChg>
+        <pc:grpChg chg="del mod">
+          <ac:chgData name="Kun Suo" userId="41c30799-3a2b-4880-86a3-8488be07954a" providerId="ADAL" clId="{01B90814-4EBE-5562-8795-CE1E7277191D}" dt="2026-06-02T17:36:40.091" v="198"/>
+          <ac:grpSpMkLst>
+            <pc:docMk/>
+            <pc:sldMk cId="0" sldId="265"/>
+            <ac:grpSpMk id="48" creationId="{ECA5BAF4-0439-998E-3912-EE799BC2526C}"/>
+          </ac:grpSpMkLst>
+        </pc:grpChg>
+        <pc:grpChg chg="del mod">
+          <ac:chgData name="Kun Suo" userId="41c30799-3a2b-4880-86a3-8488be07954a" providerId="ADAL" clId="{01B90814-4EBE-5562-8795-CE1E7277191D}" dt="2026-06-02T17:36:40.091" v="198"/>
+          <ac:grpSpMkLst>
+            <pc:docMk/>
+            <pc:sldMk cId="0" sldId="265"/>
+            <ac:grpSpMk id="50" creationId="{74C43914-7562-AC04-9C95-9B0965BB9109}"/>
+          </ac:grpSpMkLst>
+        </pc:grpChg>
+        <pc:grpChg chg="del mod">
+          <ac:chgData name="Kun Suo" userId="41c30799-3a2b-4880-86a3-8488be07954a" providerId="ADAL" clId="{01B90814-4EBE-5562-8795-CE1E7277191D}" dt="2026-06-02T17:37:02.066" v="202"/>
+          <ac:grpSpMkLst>
+            <pc:docMk/>
+            <pc:sldMk cId="0" sldId="265"/>
+            <ac:grpSpMk id="51" creationId="{120C87D7-6AB8-72ED-0691-5CB0BB55F41B}"/>
+          </ac:grpSpMkLst>
+        </pc:grpChg>
+        <pc:inkChg chg="add del mod">
+          <ac:chgData name="Kun Suo" userId="41c30799-3a2b-4880-86a3-8488be07954a" providerId="ADAL" clId="{01B90814-4EBE-5562-8795-CE1E7277191D}" dt="2026-06-02T17:36:22.228" v="177"/>
+          <ac:inkMkLst>
+            <pc:docMk/>
+            <pc:sldMk cId="0" sldId="265"/>
+            <ac:inkMk id="7" creationId="{CB2441AE-9C9F-98F6-DA01-3EF6D6062401}"/>
+          </ac:inkMkLst>
+        </pc:inkChg>
+        <pc:inkChg chg="add del mod">
+          <ac:chgData name="Kun Suo" userId="41c30799-3a2b-4880-86a3-8488be07954a" providerId="ADAL" clId="{01B90814-4EBE-5562-8795-CE1E7277191D}" dt="2026-06-02T17:36:22.229" v="179"/>
+          <ac:inkMkLst>
+            <pc:docMk/>
+            <pc:sldMk cId="0" sldId="265"/>
+            <ac:inkMk id="8" creationId="{3349771B-48D6-48E2-80DC-2D9B37024413}"/>
+          </ac:inkMkLst>
+        </pc:inkChg>
+        <pc:inkChg chg="add del mod">
+          <ac:chgData name="Kun Suo" userId="41c30799-3a2b-4880-86a3-8488be07954a" providerId="ADAL" clId="{01B90814-4EBE-5562-8795-CE1E7277191D}" dt="2026-06-02T17:36:22.231" v="188"/>
+          <ac:inkMkLst>
+            <pc:docMk/>
+            <pc:sldMk cId="0" sldId="265"/>
+            <ac:inkMk id="11" creationId="{9F364994-DB83-0BE0-5462-60603617A04B}"/>
+          </ac:inkMkLst>
+        </pc:inkChg>
+        <pc:inkChg chg="add del mod">
+          <ac:chgData name="Kun Suo" userId="41c30799-3a2b-4880-86a3-8488be07954a" providerId="ADAL" clId="{01B90814-4EBE-5562-8795-CE1E7277191D}" dt="2026-06-02T17:36:22.228" v="178"/>
+          <ac:inkMkLst>
+            <pc:docMk/>
+            <pc:sldMk cId="0" sldId="265"/>
+            <ac:inkMk id="14" creationId="{936165AE-69FB-1BD9-4726-A5A727B9AA6F}"/>
+          </ac:inkMkLst>
+        </pc:inkChg>
+        <pc:inkChg chg="add del mod">
+          <ac:chgData name="Kun Suo" userId="41c30799-3a2b-4880-86a3-8488be07954a" providerId="ADAL" clId="{01B90814-4EBE-5562-8795-CE1E7277191D}" dt="2026-06-02T17:36:22.230" v="187"/>
+          <ac:inkMkLst>
+            <pc:docMk/>
+            <pc:sldMk cId="0" sldId="265"/>
+            <ac:inkMk id="15" creationId="{22C176F1-C24A-0D87-A8A1-471F4D50FACC}"/>
+          </ac:inkMkLst>
+        </pc:inkChg>
+        <pc:inkChg chg="add del mod">
+          <ac:chgData name="Kun Suo" userId="41c30799-3a2b-4880-86a3-8488be07954a" providerId="ADAL" clId="{01B90814-4EBE-5562-8795-CE1E7277191D}" dt="2026-06-02T17:36:22.230" v="186"/>
+          <ac:inkMkLst>
+            <pc:docMk/>
+            <pc:sldMk cId="0" sldId="265"/>
+            <ac:inkMk id="16" creationId="{93E59A0F-AB5B-9C16-8148-A92CB0B28FB4}"/>
+          </ac:inkMkLst>
+        </pc:inkChg>
+        <pc:inkChg chg="add del mod">
+          <ac:chgData name="Kun Suo" userId="41c30799-3a2b-4880-86a3-8488be07954a" providerId="ADAL" clId="{01B90814-4EBE-5562-8795-CE1E7277191D}" dt="2026-06-02T17:36:22.231" v="191"/>
+          <ac:inkMkLst>
+            <pc:docMk/>
+            <pc:sldMk cId="0" sldId="265"/>
+            <ac:inkMk id="19" creationId="{F54D807D-5385-3909-2F8B-B0AA4AC3DA83}"/>
+          </ac:inkMkLst>
+        </pc:inkChg>
+        <pc:inkChg chg="add del mod">
+          <ac:chgData name="Kun Suo" userId="41c30799-3a2b-4880-86a3-8488be07954a" providerId="ADAL" clId="{01B90814-4EBE-5562-8795-CE1E7277191D}" dt="2026-06-02T17:36:22.231" v="189"/>
+          <ac:inkMkLst>
+            <pc:docMk/>
+            <pc:sldMk cId="0" sldId="265"/>
+            <ac:inkMk id="20" creationId="{603BD6E9-9977-AAD7-02D0-66A299A64AC4}"/>
+          </ac:inkMkLst>
+        </pc:inkChg>
+        <pc:inkChg chg="add del mod">
+          <ac:chgData name="Kun Suo" userId="41c30799-3a2b-4880-86a3-8488be07954a" providerId="ADAL" clId="{01B90814-4EBE-5562-8795-CE1E7277191D}" dt="2026-06-02T17:36:22.229" v="181"/>
+          <ac:inkMkLst>
+            <pc:docMk/>
+            <pc:sldMk cId="0" sldId="265"/>
+            <ac:inkMk id="23" creationId="{6DACEF61-74BB-5A67-7D4D-DBAD122FC50E}"/>
+          </ac:inkMkLst>
+        </pc:inkChg>
+        <pc:inkChg chg="add del mod">
+          <ac:chgData name="Kun Suo" userId="41c30799-3a2b-4880-86a3-8488be07954a" providerId="ADAL" clId="{01B90814-4EBE-5562-8795-CE1E7277191D}" dt="2026-06-02T17:36:22.229" v="182"/>
+          <ac:inkMkLst>
+            <pc:docMk/>
+            <pc:sldMk cId="0" sldId="265"/>
+            <ac:inkMk id="26" creationId="{6B16E603-E9BC-E4E1-6152-10E6CF7F09D2}"/>
+          </ac:inkMkLst>
+        </pc:inkChg>
+        <pc:inkChg chg="add del mod">
+          <ac:chgData name="Kun Suo" userId="41c30799-3a2b-4880-86a3-8488be07954a" providerId="ADAL" clId="{01B90814-4EBE-5562-8795-CE1E7277191D}" dt="2026-06-02T17:36:22.231" v="190"/>
+          <ac:inkMkLst>
+            <pc:docMk/>
+            <pc:sldMk cId="0" sldId="265"/>
+            <ac:inkMk id="29" creationId="{B947EA40-FAE2-5950-8479-A10A4E8D9ACA}"/>
+          </ac:inkMkLst>
+        </pc:inkChg>
+        <pc:inkChg chg="add del mod">
+          <ac:chgData name="Kun Suo" userId="41c30799-3a2b-4880-86a3-8488be07954a" providerId="ADAL" clId="{01B90814-4EBE-5562-8795-CE1E7277191D}" dt="2026-06-02T17:36:22.229" v="180"/>
+          <ac:inkMkLst>
+            <pc:docMk/>
+            <pc:sldMk cId="0" sldId="265"/>
+            <ac:inkMk id="30" creationId="{1256B62E-9AA6-D0F2-B27F-1165639CF55D}"/>
+          </ac:inkMkLst>
+        </pc:inkChg>
+        <pc:inkChg chg="add del mod">
+          <ac:chgData name="Kun Suo" userId="41c30799-3a2b-4880-86a3-8488be07954a" providerId="ADAL" clId="{01B90814-4EBE-5562-8795-CE1E7277191D}" dt="2026-06-02T17:36:22.230" v="183"/>
+          <ac:inkMkLst>
+            <pc:docMk/>
+            <pc:sldMk cId="0" sldId="265"/>
+            <ac:inkMk id="31" creationId="{58274B5B-3005-E772-1304-20899869C795}"/>
+          </ac:inkMkLst>
+        </pc:inkChg>
+        <pc:inkChg chg="add del mod">
+          <ac:chgData name="Kun Suo" userId="41c30799-3a2b-4880-86a3-8488be07954a" providerId="ADAL" clId="{01B90814-4EBE-5562-8795-CE1E7277191D}" dt="2026-06-02T17:36:22.228" v="176"/>
+          <ac:inkMkLst>
+            <pc:docMk/>
+            <pc:sldMk cId="0" sldId="265"/>
+            <ac:inkMk id="34" creationId="{0BC74957-A48B-0D71-0A16-40409A5DE994}"/>
+          </ac:inkMkLst>
+        </pc:inkChg>
+        <pc:inkChg chg="add del mod">
+          <ac:chgData name="Kun Suo" userId="41c30799-3a2b-4880-86a3-8488be07954a" providerId="ADAL" clId="{01B90814-4EBE-5562-8795-CE1E7277191D}" dt="2026-06-02T17:36:22.232" v="192"/>
+          <ac:inkMkLst>
+            <pc:docMk/>
+            <pc:sldMk cId="0" sldId="265"/>
+            <ac:inkMk id="35" creationId="{CE2AB992-B0C7-0DD3-EE48-06BD00202E96}"/>
+          </ac:inkMkLst>
+        </pc:inkChg>
+        <pc:inkChg chg="add del mod">
+          <ac:chgData name="Kun Suo" userId="41c30799-3a2b-4880-86a3-8488be07954a" providerId="ADAL" clId="{01B90814-4EBE-5562-8795-CE1E7277191D}" dt="2026-06-02T17:36:22.230" v="184"/>
+          <ac:inkMkLst>
+            <pc:docMk/>
+            <pc:sldMk cId="0" sldId="265"/>
+            <ac:inkMk id="36" creationId="{F90D6DCB-38E5-2BCC-871C-8B29095F56C7}"/>
+          </ac:inkMkLst>
+        </pc:inkChg>
+        <pc:inkChg chg="add del mod">
+          <ac:chgData name="Kun Suo" userId="41c30799-3a2b-4880-86a3-8488be07954a" providerId="ADAL" clId="{01B90814-4EBE-5562-8795-CE1E7277191D}" dt="2026-06-02T17:36:22.228" v="175"/>
+          <ac:inkMkLst>
+            <pc:docMk/>
+            <pc:sldMk cId="0" sldId="265"/>
+            <ac:inkMk id="37" creationId="{7A73CF96-CE7A-9142-50A6-BE106783D44B}"/>
+          </ac:inkMkLst>
+        </pc:inkChg>
+        <pc:inkChg chg="add del mod">
+          <ac:chgData name="Kun Suo" userId="41c30799-3a2b-4880-86a3-8488be07954a" providerId="ADAL" clId="{01B90814-4EBE-5562-8795-CE1E7277191D}" dt="2026-06-02T17:36:22.230" v="185"/>
+          <ac:inkMkLst>
+            <pc:docMk/>
+            <pc:sldMk cId="0" sldId="265"/>
+            <ac:inkMk id="38" creationId="{915EA98A-AE99-D3FF-2834-D3DBB418219A}"/>
+          </ac:inkMkLst>
+        </pc:inkChg>
+        <pc:inkChg chg="add del mod">
+          <ac:chgData name="Kun Suo" userId="41c30799-3a2b-4880-86a3-8488be07954a" providerId="ADAL" clId="{01B90814-4EBE-5562-8795-CE1E7277191D}" dt="2026-06-02T17:36:22.232" v="193"/>
+          <ac:inkMkLst>
+            <pc:docMk/>
+            <pc:sldMk cId="0" sldId="265"/>
+            <ac:inkMk id="39" creationId="{48DB6D0E-14DA-70AC-57CB-70740304D292}"/>
+          </ac:inkMkLst>
+        </pc:inkChg>
+        <pc:inkChg chg="add del">
+          <ac:chgData name="Kun Suo" userId="41c30799-3a2b-4880-86a3-8488be07954a" providerId="ADAL" clId="{01B90814-4EBE-5562-8795-CE1E7277191D}" dt="2026-06-02T17:36:22.227" v="174"/>
+          <ac:inkMkLst>
+            <pc:docMk/>
+            <pc:sldMk cId="0" sldId="265"/>
+            <ac:inkMk id="40" creationId="{EB8CCE20-EF75-4951-BFF2-62D0C1B70256}"/>
+          </ac:inkMkLst>
+        </pc:inkChg>
+        <pc:inkChg chg="add del mod">
+          <ac:chgData name="Kun Suo" userId="41c30799-3a2b-4880-86a3-8488be07954a" providerId="ADAL" clId="{01B90814-4EBE-5562-8795-CE1E7277191D}" dt="2026-06-02T17:37:02.065" v="201"/>
+          <ac:inkMkLst>
+            <pc:docMk/>
+            <pc:sldMk cId="0" sldId="265"/>
+            <ac:inkMk id="45" creationId="{7371D172-9723-9243-B36E-6AC9BE7C9BCD}"/>
+          </ac:inkMkLst>
+        </pc:inkChg>
+        <pc:inkChg chg="add del mod">
+          <ac:chgData name="Kun Suo" userId="41c30799-3a2b-4880-86a3-8488be07954a" providerId="ADAL" clId="{01B90814-4EBE-5562-8795-CE1E7277191D}" dt="2026-06-02T17:37:02.066" v="202"/>
+          <ac:inkMkLst>
+            <pc:docMk/>
+            <pc:sldMk cId="0" sldId="265"/>
+            <ac:inkMk id="46" creationId="{5F6DF7B1-1155-CCF2-979B-D6B1C9303D36}"/>
+          </ac:inkMkLst>
+        </pc:inkChg>
+        <pc:inkChg chg="add del mod">
+          <ac:chgData name="Kun Suo" userId="41c30799-3a2b-4880-86a3-8488be07954a" providerId="ADAL" clId="{01B90814-4EBE-5562-8795-CE1E7277191D}" dt="2026-06-02T17:37:02.066" v="203"/>
+          <ac:inkMkLst>
+            <pc:docMk/>
+            <pc:sldMk cId="0" sldId="265"/>
+            <ac:inkMk id="49" creationId="{F8D6244F-CFF1-6138-687C-15D5E7CC1638}"/>
+          </ac:inkMkLst>
+        </pc:inkChg>
+        <pc:inkChg chg="add del">
+          <ac:chgData name="Kun Suo" userId="41c30799-3a2b-4880-86a3-8488be07954a" providerId="ADAL" clId="{01B90814-4EBE-5562-8795-CE1E7277191D}" dt="2026-06-02T17:37:02.065" v="200"/>
+          <ac:inkMkLst>
+            <pc:docMk/>
+            <pc:sldMk cId="0" sldId="265"/>
+            <ac:inkMk id="52" creationId="{D29F9D97-E885-7D93-6298-C5611A0104CB}"/>
+          </ac:inkMkLst>
+        </pc:inkChg>
+      </pc:sldChg>
+    </pc:docChg>
+  </pc:docChgLst>
+</pc:chgInfo>
+</file>
+
+<file path=ppt/notesMasters/notesMaster1.xml><?xml version="1.0" encoding="utf-8"?>
+<p:notesMaster xmlns:a="http://schemas.openxmlformats.org/drawingml/2006/main" xmlns:r="http://schemas.openxmlformats.org/officeDocument/2006/relationships" xmlns:p="http://schemas.openxmlformats.org/presentationml/2006/main">
+  <p:cSld>
+    <p:bg>
+      <p:bgRef idx="1001">
+        <a:schemeClr val="bg1"/>
+      </p:bgRef>
+    </p:bg>
+    <p:spTree>
+      <p:nvGrpSpPr>
+        <p:cNvPr id="1" name=""/>
+        <p:cNvGrpSpPr/>
+        <p:nvPr/>
+      </p:nvGrpSpPr>
+      <p:grpSpPr>
+        <a:xfrm>
+          <a:off x="0" y="0"/>
+          <a:ext cx="0" cy="0"/>
+          <a:chOff x="0" y="0"/>
+          <a:chExt cx="0" cy="0"/>
+        </a:xfrm>
+      </p:grpSpPr>
+      <p:sp>
+        <p:nvSpPr>
+          <p:cNvPr id="2" name="Header Placeholder 1"/>
+          <p:cNvSpPr>
+            <a:spLocks noGrp="1"/>
+          </p:cNvSpPr>
+          <p:nvPr>
+            <p:ph type="hdr" sz="quarter"/>
+          </p:nvPr>
+        </p:nvSpPr>
+        <p:spPr>
+          <a:xfrm>
+            <a:off x="0" y="0"/>
+            <a:ext cx="1997075" cy="173038"/>
+          </a:xfrm>
+          <a:prstGeom prst="rect">
+            <a:avLst/>
+          </a:prstGeom>
+        </p:spPr>
+        <p:txBody>
+          <a:bodyPr vert="horz" lIns="91440" tIns="45720" rIns="91440" bIns="45720" rtlCol="0"/>
+          <a:lstStyle>
+            <a:lvl1pPr algn="l">
+              <a:defRPr sz="1200"/>
+            </a:lvl1pPr>
+          </a:lstStyle>
+          <a:p>
+            <a:endParaRPr lang="en-US"/>
+          </a:p>
+        </p:txBody>
+      </p:sp>
+      <p:sp>
+        <p:nvSpPr>
+          <p:cNvPr id="3" name="Date Placeholder 2"/>
+          <p:cNvSpPr>
+            <a:spLocks noGrp="1"/>
+          </p:cNvSpPr>
+          <p:nvPr>
+            <p:ph type="dt" idx="1"/>
+          </p:nvPr>
+        </p:nvSpPr>
+        <p:spPr>
+          <a:xfrm>
+            <a:off x="2611438" y="0"/>
+            <a:ext cx="1997075" cy="173038"/>
+          </a:xfrm>
+          <a:prstGeom prst="rect">
+            <a:avLst/>
+          </a:prstGeom>
+        </p:spPr>
+        <p:txBody>
+          <a:bodyPr vert="horz" lIns="91440" tIns="45720" rIns="91440" bIns="45720" rtlCol="0"/>
+          <a:lstStyle>
+            <a:lvl1pPr algn="r">
+              <a:defRPr sz="1200"/>
+            </a:lvl1pPr>
+          </a:lstStyle>
+          <a:p>
+            <a:fld id="{275434A6-721E-8B46-8226-4B207A2DE40C}" type="datetimeFigureOut">
+              <a:rPr lang="en-US" smtClean="0"/>
+              <a:t>6/2/26</a:t>
+            </a:fld>
+            <a:endParaRPr lang="en-US"/>
+          </a:p>
+        </p:txBody>
+      </p:sp>
+      <p:sp>
+        <p:nvSpPr>
+          <p:cNvPr id="4" name="Slide Image Placeholder 3"/>
+          <p:cNvSpPr>
+            <a:spLocks noGrp="1" noRot="1" noChangeAspect="1"/>
+          </p:cNvSpPr>
+          <p:nvPr>
+            <p:ph type="sldImg" idx="2"/>
+          </p:nvPr>
+        </p:nvSpPr>
+        <p:spPr>
+          <a:xfrm>
+            <a:off x="1527175" y="433388"/>
+            <a:ext cx="1555750" cy="1166812"/>
+          </a:xfrm>
+          <a:prstGeom prst="rect">
+            <a:avLst/>
+          </a:prstGeom>
+          <a:noFill/>
+          <a:ln w="12700">
+            <a:solidFill>
+              <a:prstClr val="black"/>
+            </a:solidFill>
+          </a:ln>
+        </p:spPr>
+        <p:txBody>
+          <a:bodyPr vert="horz" lIns="91440" tIns="45720" rIns="91440" bIns="45720" rtlCol="0" anchor="ctr"/>
+          <a:lstStyle/>
+          <a:p>
+            <a:endParaRPr lang="en-US"/>
+          </a:p>
+        </p:txBody>
+      </p:sp>
+      <p:sp>
+        <p:nvSpPr>
+          <p:cNvPr id="5" name="Notes Placeholder 4"/>
+          <p:cNvSpPr>
+            <a:spLocks noGrp="1"/>
+          </p:cNvSpPr>
+          <p:nvPr>
+            <p:ph type="body" sz="quarter" idx="3"/>
+          </p:nvPr>
+        </p:nvSpPr>
+        <p:spPr>
+          <a:xfrm>
+            <a:off x="460375" y="1665288"/>
+            <a:ext cx="3689350" cy="1363662"/>
+          </a:xfrm>
+          <a:prstGeom prst="rect">
+            <a:avLst/>
+          </a:prstGeom>
+        </p:spPr>
+        <p:txBody>
+          <a:bodyPr vert="horz" lIns="91440" tIns="45720" rIns="91440" bIns="45720" rtlCol="0"/>
+          <a:lstStyle/>
+          <a:p>
+            <a:pPr lvl="0"/>
+            <a:r>
+              <a:rPr lang="en-US"/>
+              <a:t>Click to edit Master text styles</a:t>
+            </a:r>
+          </a:p>
+          <a:p>
+            <a:pPr lvl="1"/>
+            <a:r>
+              <a:rPr lang="en-US"/>
+              <a:t>Second level</a:t>
+            </a:r>
+          </a:p>
+          <a:p>
+            <a:pPr lvl="2"/>
+            <a:r>
+              <a:rPr lang="en-US"/>
+              <a:t>Third level</a:t>
+            </a:r>
+          </a:p>
+          <a:p>
+            <a:pPr lvl="3"/>
+            <a:r>
+              <a:rPr lang="en-US"/>
+              <a:t>Fourth level</a:t>
+            </a:r>
+          </a:p>
+          <a:p>
+            <a:pPr lvl="4"/>
+            <a:r>
+              <a:rPr lang="en-US"/>
+              <a:t>Fifth level</a:t>
+            </a:r>
+          </a:p>
+        </p:txBody>
+      </p:sp>
+      <p:sp>
+        <p:nvSpPr>
+          <p:cNvPr id="6" name="Footer Placeholder 5"/>
+          <p:cNvSpPr>
+            <a:spLocks noGrp="1"/>
+          </p:cNvSpPr>
+          <p:nvPr>
+            <p:ph type="ftr" sz="quarter" idx="4"/>
+          </p:nvPr>
+        </p:nvSpPr>
+        <p:spPr>
+          <a:xfrm>
+            <a:off x="0" y="3287713"/>
+            <a:ext cx="1997075" cy="173037"/>
+          </a:xfrm>
+          <a:prstGeom prst="rect">
+            <a:avLst/>
+          </a:prstGeom>
+        </p:spPr>
+        <p:txBody>
+          <a:bodyPr vert="horz" lIns="91440" tIns="45720" rIns="91440" bIns="45720" rtlCol="0" anchor="b"/>
+          <a:lstStyle>
+            <a:lvl1pPr algn="l">
+              <a:defRPr sz="1200"/>
+            </a:lvl1pPr>
+          </a:lstStyle>
+          <a:p>
+            <a:endParaRPr lang="en-US"/>
+          </a:p>
+        </p:txBody>
+      </p:sp>
+      <p:sp>
+        <p:nvSpPr>
+          <p:cNvPr id="7" name="Slide Number Placeholder 6"/>
+          <p:cNvSpPr>
+            <a:spLocks noGrp="1"/>
+          </p:cNvSpPr>
+          <p:nvPr>
+            <p:ph type="sldNum" sz="quarter" idx="5"/>
+          </p:nvPr>
+        </p:nvSpPr>
+        <p:spPr>
+          <a:xfrm>
+            <a:off x="2611438" y="3287713"/>
+            <a:ext cx="1997075" cy="173037"/>
+          </a:xfrm>
+          <a:prstGeom prst="rect">
+            <a:avLst/>
+          </a:prstGeom>
+        </p:spPr>
+        <p:txBody>
+          <a:bodyPr vert="horz" lIns="91440" tIns="45720" rIns="91440" bIns="45720" rtlCol="0" anchor="b"/>
+          <a:lstStyle>
+            <a:lvl1pPr algn="r">
+              <a:defRPr sz="1200"/>
+            </a:lvl1pPr>
+          </a:lstStyle>
+          <a:p>
+            <a:fld id="{FC1473EE-AF0F-8541-A3FA-B715EDFA03B2}" type="slidenum">
+              <a:rPr lang="en-US" smtClean="0"/>
+              <a:t>‹#›</a:t>
+            </a:fld>
+            <a:endParaRPr lang="en-US"/>
+          </a:p>
+        </p:txBody>
+      </p:sp>
+    </p:spTree>
+    <p:extLst>
+      <p:ext uri="{BB962C8B-B14F-4D97-AF65-F5344CB8AC3E}">
+        <p14:creationId xmlns:p14="http://schemas.microsoft.com/office/powerpoint/2010/main" val="850025808"/>
+      </p:ext>
+    </p:extLst>
+  </p:cSld>
+  <p:clrMap bg1="lt1" tx1="dk1" bg2="lt2" tx2="dk2" accent1="accent1" accent2="accent2" accent3="accent3" accent4="accent4" accent5="accent5" accent6="accent6" hlink="hlink" folHlink="folHlink"/>
+  <p:notesStyle>
+    <a:lvl1pPr marL="0" algn="l" defTabSz="914400" rtl="0" eaLnBrk="1" latinLnBrk="0" hangingPunct="1">
+      <a:defRPr sz="1200" kern="1200">
+        <a:solidFill>
+          <a:schemeClr val="tx1"/>
+        </a:solidFill>
+        <a:latin typeface="+mn-lt"/>
+        <a:ea typeface="+mn-ea"/>
+        <a:cs typeface="+mn-cs"/>
+      </a:defRPr>
+    </a:lvl1pPr>
+    <a:lvl2pPr marL="457200" algn="l" defTabSz="914400" rtl="0" eaLnBrk="1" latinLnBrk="0" hangingPunct="1">
+      <a:defRPr sz="1200" kern="1200">
+        <a:solidFill>
+          <a:schemeClr val="tx1"/>
+        </a:solidFill>
+        <a:latin typeface="+mn-lt"/>
+        <a:ea typeface="+mn-ea"/>
+        <a:cs typeface="+mn-cs"/>
+      </a:defRPr>
+    </a:lvl2pPr>
+    <a:lvl3pPr marL="914400" algn="l" defTabSz="914400" rtl="0" eaLnBrk="1" latinLnBrk="0" hangingPunct="1">
+      <a:defRPr sz="1200" kern="1200">
+        <a:solidFill>
+          <a:schemeClr val="tx1"/>
+        </a:solidFill>
+        <a:latin typeface="+mn-lt"/>
+        <a:ea typeface="+mn-ea"/>
+        <a:cs typeface="+mn-cs"/>
+      </a:defRPr>
+    </a:lvl3pPr>
+    <a:lvl4pPr marL="1371600" algn="l" defTabSz="914400" rtl="0" eaLnBrk="1" latinLnBrk="0" hangingPunct="1">
+      <a:defRPr sz="1200" kern="1200">
+        <a:solidFill>
+          <a:schemeClr val="tx1"/>
+        </a:solidFill>
+        <a:latin typeface="+mn-lt"/>
+        <a:ea typeface="+mn-ea"/>
+        <a:cs typeface="+mn-cs"/>
+      </a:defRPr>
+    </a:lvl4pPr>
+    <a:lvl5pPr marL="1828800" algn="l" defTabSz="914400" rtl="0" eaLnBrk="1" latinLnBrk="0" hangingPunct="1">
+      <a:defRPr sz="1200" kern="1200">
+        <a:solidFill>
+          <a:schemeClr val="tx1"/>
+        </a:solidFill>
+        <a:latin typeface="+mn-lt"/>
+        <a:ea typeface="+mn-ea"/>
+        <a:cs typeface="+mn-cs"/>
+      </a:defRPr>
+    </a:lvl5pPr>
+    <a:lvl6pPr marL="2286000" algn="l" defTabSz="914400" rtl="0" eaLnBrk="1" latinLnBrk="0" hangingPunct="1">
+      <a:defRPr sz="1200" kern="1200">
+        <a:solidFill>
+          <a:schemeClr val="tx1"/>
+        </a:solidFill>
+        <a:latin typeface="+mn-lt"/>
+        <a:ea typeface="+mn-ea"/>
+        <a:cs typeface="+mn-cs"/>
+      </a:defRPr>
+    </a:lvl6pPr>
+    <a:lvl7pPr marL="2743200" algn="l" defTabSz="914400" rtl="0" eaLnBrk="1" latinLnBrk="0" hangingPunct="1">
+      <a:defRPr sz="1200" kern="1200">
+        <a:solidFill>
+          <a:schemeClr val="tx1"/>
+        </a:solidFill>
+        <a:latin typeface="+mn-lt"/>
+        <a:ea typeface="+mn-ea"/>
+        <a:cs typeface="+mn-cs"/>
+      </a:defRPr>
+    </a:lvl7pPr>
+    <a:lvl8pPr marL="3200400" algn="l" defTabSz="914400" rtl="0" eaLnBrk="1" latinLnBrk="0" hangingPunct="1">
+      <a:defRPr sz="1200" kern="1200">
+        <a:solidFill>
+          <a:schemeClr val="tx1"/>
+        </a:solidFill>
+        <a:latin typeface="+mn-lt"/>
+        <a:ea typeface="+mn-ea"/>
+        <a:cs typeface="+mn-cs"/>
+      </a:defRPr>
+    </a:lvl8pPr>
+    <a:lvl9pPr marL="3657600" algn="l" defTabSz="914400" rtl="0" eaLnBrk="1" latinLnBrk="0" hangingPunct="1">
+      <a:defRPr sz="1200" kern="1200">
+        <a:solidFill>
+          <a:schemeClr val="tx1"/>
+        </a:solidFill>
+        <a:latin typeface="+mn-lt"/>
+        <a:ea typeface="+mn-ea"/>
+        <a:cs typeface="+mn-cs"/>
+      </a:defRPr>
+    </a:lvl9pPr>
+  </p:notesStyle>
+</p:notesMaster>
+</file>
+
+<file path=ppt/notesSlides/notesSlide1.xml><?xml version="1.0" encoding="utf-8"?>
+<p:notes xmlns:a="http://schemas.openxmlformats.org/drawingml/2006/main" xmlns:r="http://schemas.openxmlformats.org/officeDocument/2006/relationships" xmlns:p="http://schemas.openxmlformats.org/presentationml/2006/main">
+  <p:cSld>
+    <p:spTree>
+      <p:nvGrpSpPr>
+        <p:cNvPr id="1" name=""/>
+        <p:cNvGrpSpPr/>
+        <p:nvPr/>
+      </p:nvGrpSpPr>
+      <p:grpSpPr>
+        <a:xfrm>
+          <a:off x="0" y="0"/>
+          <a:ext cx="0" cy="0"/>
+          <a:chOff x="0" y="0"/>
+          <a:chExt cx="0" cy="0"/>
+        </a:xfrm>
+      </p:grpSpPr>
+      <p:sp>
+        <p:nvSpPr>
+          <p:cNvPr id="2" name="Slide Image Placeholder 1"/>
+          <p:cNvSpPr>
+            <a:spLocks noGrp="1" noRot="1" noChangeAspect="1"/>
+          </p:cNvSpPr>
+          <p:nvPr>
+            <p:ph type="sldImg"/>
+          </p:nvPr>
+        </p:nvSpPr>
+        <p:spPr/>
+      </p:sp>
+      <p:sp>
+        <p:nvSpPr>
+          <p:cNvPr id="3" name="Notes Placeholder 2"/>
+          <p:cNvSpPr>
+            <a:spLocks noGrp="1"/>
+          </p:cNvSpPr>
+          <p:nvPr>
+            <p:ph type="body" idx="1"/>
+          </p:nvPr>
+        </p:nvSpPr>
+        <p:spPr/>
+        <p:txBody>
+          <a:bodyPr/>
+          <a:lstStyle/>
+          <a:p>
+            <a:r>
+              <a:rPr lang="en-US" sz="1200" b="0" i="0" u="none" strike="noStrike" kern="1200" dirty="0" err="1">
+                <a:solidFill>
+                  <a:schemeClr val="tx1"/>
+                </a:solidFill>
+                <a:effectLst/>
+                <a:latin typeface="+mn-lt"/>
+                <a:ea typeface="+mn-ea"/>
+                <a:cs typeface="+mn-cs"/>
+              </a:rPr>
+              <a:t>全等的</a:t>
+            </a:r>
+            <a:endParaRPr lang="en-US" dirty="0"/>
+          </a:p>
+        </p:txBody>
+      </p:sp>
+      <p:sp>
+        <p:nvSpPr>
+          <p:cNvPr id="4" name="Slide Number Placeholder 3"/>
+          <p:cNvSpPr>
+            <a:spLocks noGrp="1"/>
+          </p:cNvSpPr>
+          <p:nvPr>
+            <p:ph type="sldNum" sz="quarter" idx="5"/>
+          </p:nvPr>
+        </p:nvSpPr>
+        <p:spPr/>
+        <p:txBody>
+          <a:bodyPr/>
+          <a:lstStyle/>
+          <a:p>
+            <a:fld id="{FC1473EE-AF0F-8541-A3FA-B715EDFA03B2}" type="slidenum">
+              <a:rPr lang="en-US" smtClean="0"/>
+              <a:t>8</a:t>
+            </a:fld>
+            <a:endParaRPr lang="en-US"/>
+          </a:p>
+        </p:txBody>
+      </p:sp>
+    </p:spTree>
+    <p:extLst>
+      <p:ext uri="{BB962C8B-B14F-4D97-AF65-F5344CB8AC3E}">
+        <p14:creationId xmlns:p14="http://schemas.microsoft.com/office/powerpoint/2010/main" val="4211489990"/>
+      </p:ext>
+    </p:extLst>
+  </p:cSld>
+  <p:clrMapOvr>
+    <a:masterClrMapping/>
+  </p:clrMapOvr>
+</p:notes>
 </file>
 
 <file path=ppt/slideLayouts/slideLayout1.xml><?xml version="1.0" encoding="utf-8"?>
@@ -6890,7 +8683,7 @@
               </a:rPr>
               <a:t>form:</a:t>
             </a:r>
-            <a:endParaRPr sz="1100">
+            <a:endParaRPr sz="1100" dirty="0">
               <a:latin typeface="Tahoma"/>
               <a:cs typeface="Tahoma"/>
             </a:endParaRPr>
@@ -7366,7 +9159,7 @@
               </a:rPr>
               <a:t>.</a:t>
             </a:r>
-            <a:endParaRPr sz="1100">
+            <a:endParaRPr sz="1100" dirty="0">
               <a:latin typeface="Tahoma"/>
               <a:cs typeface="Tahoma"/>
             </a:endParaRPr>
@@ -8687,7 +10480,7 @@
               </a:rPr>
               <a:t>to</a:t>
             </a:r>
-            <a:endParaRPr sz="1100">
+            <a:endParaRPr sz="1100" dirty="0">
               <a:latin typeface="Tahoma"/>
               <a:cs typeface="Tahoma"/>
             </a:endParaRPr>
@@ -8765,7 +10558,7 @@
               </a:rPr>
               <a:t>x</a:t>
             </a:r>
-            <a:endParaRPr sz="1200" baseline="27777">
+            <a:endParaRPr sz="1200" baseline="27777" dirty="0">
               <a:latin typeface="Constantia"/>
               <a:cs typeface="Constantia"/>
             </a:endParaRPr>
@@ -8877,7 +10670,7 @@
               </a:rPr>
               <a:t>.</a:t>
             </a:r>
-            <a:endParaRPr sz="1100">
+            <a:endParaRPr sz="1100" dirty="0">
               <a:latin typeface="Tahoma"/>
               <a:cs typeface="Tahoma"/>
             </a:endParaRPr>
@@ -9318,7 +11111,7 @@
               </a:rPr>
               <a:t>·</a:t>
             </a:r>
-            <a:endParaRPr sz="1100">
+            <a:endParaRPr sz="1100" dirty="0">
               <a:latin typeface="Verdana"/>
               <a:cs typeface="Verdana"/>
             </a:endParaRPr>
@@ -9584,7 +11377,7 @@
               </a:rPr>
               <a:t>.</a:t>
             </a:r>
-            <a:endParaRPr sz="1100">
+            <a:endParaRPr sz="1100" dirty="0">
               <a:latin typeface="Tahoma"/>
               <a:cs typeface="Tahoma"/>
             </a:endParaRPr>
@@ -9935,7 +11728,7 @@
               </a:rPr>
               <a:t>=</a:t>
             </a:r>
-            <a:endParaRPr sz="1100">
+            <a:endParaRPr sz="1100" dirty="0">
               <a:latin typeface="Tahoma"/>
               <a:cs typeface="Tahoma"/>
             </a:endParaRPr>
@@ -10335,8 +12128,8 @@
         </p:nvSpPr>
         <p:spPr>
           <a:xfrm>
-            <a:off x="402932" y="965794"/>
-            <a:ext cx="1332230" cy="420370"/>
+            <a:off x="267220" y="965794"/>
+            <a:ext cx="1468120" cy="407163"/>
           </a:xfrm>
           <a:prstGeom prst="rect">
             <a:avLst/>
@@ -10391,7 +12184,7 @@
               </a:rPr>
               <a:t>x</a:t>
             </a:r>
-            <a:endParaRPr sz="1100">
+            <a:endParaRPr sz="1100" dirty="0">
               <a:latin typeface="Trebuchet MS"/>
               <a:cs typeface="Trebuchet MS"/>
             </a:endParaRPr>
@@ -10503,7 +12296,14 @@
               </a:rPr>
               <a:t>1</a:t>
             </a:r>
-            <a:endParaRPr sz="1100">
+            <a:r>
+              <a:rPr lang="en-US" sz="1100" spc="-25" dirty="0">
+                <a:latin typeface="Tahoma"/>
+                <a:cs typeface="Tahoma"/>
+              </a:rPr>
+              <a:t>,…</a:t>
+            </a:r>
+            <a:endParaRPr sz="1100" dirty="0">
               <a:latin typeface="Tahoma"/>
               <a:cs typeface="Tahoma"/>
             </a:endParaRPr>
@@ -10757,7 +12557,7 @@
               </a:rPr>
               <a:t>·</a:t>
             </a:r>
-            <a:endParaRPr sz="1100">
+            <a:endParaRPr sz="1100" dirty="0">
               <a:latin typeface="Verdana"/>
               <a:cs typeface="Verdana"/>
             </a:endParaRPr>
@@ -10800,7 +12600,7 @@
               </a:rPr>
               <a:t>1</a:t>
             </a:r>
-            <a:endParaRPr sz="1100">
+            <a:endParaRPr sz="1100" dirty="0">
               <a:latin typeface="Tahoma"/>
               <a:cs typeface="Tahoma"/>
             </a:endParaRPr>
@@ -10926,7 +12726,7 @@
               </a:rPr>
               <a:t>x</a:t>
             </a:r>
-            <a:endParaRPr sz="1100">
+            <a:endParaRPr sz="1100" dirty="0">
               <a:latin typeface="Trebuchet MS"/>
               <a:cs typeface="Trebuchet MS"/>
             </a:endParaRPr>
@@ -11172,7 +12972,7 @@
               </a:rPr>
               <a:t>·</a:t>
             </a:r>
-            <a:endParaRPr sz="1100">
+            <a:endParaRPr sz="1100" dirty="0">
               <a:latin typeface="Verdana"/>
               <a:cs typeface="Verdana"/>
             </a:endParaRPr>
@@ -11868,7 +13668,7 @@
               </a:rPr>
               <a:t>·</a:t>
             </a:r>
-            <a:endParaRPr sz="1100">
+            <a:endParaRPr sz="1100" dirty="0">
               <a:latin typeface="Verdana"/>
               <a:cs typeface="Verdana"/>
             </a:endParaRPr>
@@ -12528,7 +14328,7 @@
               </a:rPr>
               <a:t>.</a:t>
             </a:r>
-            <a:endParaRPr sz="1100">
+            <a:endParaRPr sz="1100" dirty="0">
               <a:latin typeface="Verdana"/>
               <a:cs typeface="Verdana"/>
             </a:endParaRPr>
@@ -12542,7 +14342,7 @@
                 <a:spcPts val="1145"/>
               </a:spcBef>
             </a:pPr>
-            <a:endParaRPr sz="1100">
+            <a:endParaRPr sz="1100" dirty="0">
               <a:latin typeface="Verdana"/>
               <a:cs typeface="Verdana"/>
             </a:endParaRPr>
@@ -13039,7 +14839,7 @@
               </a:rPr>
               <a:t>·</a:t>
             </a:r>
-            <a:endParaRPr sz="1100">
+            <a:endParaRPr sz="1100" dirty="0">
               <a:latin typeface="Verdana"/>
               <a:cs typeface="Verdana"/>
             </a:endParaRPr>
@@ -13459,7 +15259,7 @@
               </a:rPr>
               <a:t>·</a:t>
             </a:r>
-            <a:endParaRPr sz="1100">
+            <a:endParaRPr sz="1100" dirty="0">
               <a:latin typeface="Verdana"/>
               <a:cs typeface="Verdana"/>
             </a:endParaRPr>
@@ -16238,7 +18038,7 @@
           <p:nvPr/>
         </p:nvPicPr>
         <p:blipFill>
-          <a:blip r:embed="rId2" cstate="print"/>
+          <a:blip r:embed="rId3" cstate="print"/>
           <a:stretch>
             <a:fillRect/>
           </a:stretch>
@@ -17405,7 +19205,7 @@
           <p:nvPr/>
         </p:nvPicPr>
         <p:blipFill>
-          <a:blip r:embed="rId3" cstate="print"/>
+          <a:blip r:embed="rId4" cstate="print"/>
           <a:stretch>
             <a:fillRect/>
           </a:stretch>
@@ -17433,7 +19233,7 @@
           <p:nvPr/>
         </p:nvPicPr>
         <p:blipFill>
-          <a:blip r:embed="rId4" cstate="print"/>
+          <a:blip r:embed="rId5" cstate="print"/>
           <a:stretch>
             <a:fillRect/>
           </a:stretch>
@@ -17461,7 +19261,7 @@
           <p:nvPr/>
         </p:nvPicPr>
         <p:blipFill>
-          <a:blip r:embed="rId5" cstate="print"/>
+          <a:blip r:embed="rId6" cstate="print"/>
           <a:stretch>
             <a:fillRect/>
           </a:stretch>
@@ -17975,11 +19775,18 @@
               <a:t> </a:t>
             </a:r>
             <a:r>
-              <a:rPr sz="1100" i="1" dirty="0">
-                <a:latin typeface="Trebuchet MS"/>
-                <a:cs typeface="Trebuchet MS"/>
-              </a:rPr>
-              <a:t>bk</a:t>
+              <a:rPr lang="en-US" sz="1100" i="1" dirty="0" err="1">
+                <a:latin typeface="Trebuchet MS"/>
+                <a:cs typeface="Trebuchet MS"/>
+              </a:rPr>
+              <a:t>n</a:t>
+            </a:r>
+            <a:r>
+              <a:rPr sz="1100" i="1" dirty="0" err="1">
+                <a:latin typeface="Trebuchet MS"/>
+                <a:cs typeface="Trebuchet MS"/>
+              </a:rPr>
+              <a:t>k</a:t>
             </a:r>
             <a:r>
               <a:rPr sz="1100" i="1" spc="80" dirty="0">
@@ -19400,4 +21207,319 @@
   <a:objectDefaults/>
   <a:extraClrSchemeLst/>
 </a:theme>
+</file>
+
+<file path=ppt/theme/theme2.xml><?xml version="1.0" encoding="utf-8"?>
+<a:theme xmlns:a="http://schemas.openxmlformats.org/drawingml/2006/main" name="Office Theme">
+  <a:themeElements>
+    <a:clrScheme name="Office">
+      <a:dk1>
+        <a:sysClr val="windowText" lastClr="000000"/>
+      </a:dk1>
+      <a:lt1>
+        <a:sysClr val="window" lastClr="FFFFFF"/>
+      </a:lt1>
+      <a:dk2>
+        <a:srgbClr val="0E2841"/>
+      </a:dk2>
+      <a:lt2>
+        <a:srgbClr val="E8E8E8"/>
+      </a:lt2>
+      <a:accent1>
+        <a:srgbClr val="156082"/>
+      </a:accent1>
+      <a:accent2>
+        <a:srgbClr val="E97132"/>
+      </a:accent2>
+      <a:accent3>
+        <a:srgbClr val="196B24"/>
+      </a:accent3>
+      <a:accent4>
+        <a:srgbClr val="0F9ED5"/>
+      </a:accent4>
+      <a:accent5>
+        <a:srgbClr val="A02B93"/>
+      </a:accent5>
+      <a:accent6>
+        <a:srgbClr val="4EA72E"/>
+      </a:accent6>
+      <a:hlink>
+        <a:srgbClr val="467886"/>
+      </a:hlink>
+      <a:folHlink>
+        <a:srgbClr val="96607D"/>
+      </a:folHlink>
+    </a:clrScheme>
+    <a:fontScheme name="Office">
+      <a:majorFont>
+        <a:latin typeface="Aptos Display" panose="02110004020202020204"/>
+        <a:ea typeface=""/>
+        <a:cs typeface=""/>
+        <a:font script="Jpan" typeface="游ゴシック Light"/>
+        <a:font script="Hang" typeface="맑은 고딕"/>
+        <a:font script="Hans" typeface="等线 Light"/>
+        <a:font script="Hant" typeface="新細明體"/>
+        <a:font script="Arab" typeface="Times New Roman"/>
+        <a:font script="Hebr" typeface="Times New Roman"/>
+        <a:font script="Thai" typeface="Angsana New"/>
+        <a:font script="Ethi" typeface="Nyala"/>
+        <a:font script="Beng" typeface="Vrinda"/>
+        <a:font script="Gujr" typeface="Shruti"/>
+        <a:font script="Khmr" typeface="MoolBoran"/>
+        <a:font script="Knda" typeface="Tunga"/>
+        <a:font script="Guru" typeface="Raavi"/>
+        <a:font script="Cans" typeface="Euphemia"/>
+        <a:font script="Cher" typeface="Plantagenet Cherokee"/>
+        <a:font script="Yiii" typeface="Microsoft Yi Baiti"/>
+        <a:font script="Tibt" typeface="Microsoft Himalaya"/>
+        <a:font script="Thaa" typeface="MV Boli"/>
+        <a:font script="Deva" typeface="Mangal"/>
+        <a:font script="Telu" typeface="Gautami"/>
+        <a:font script="Taml" typeface="Latha"/>
+        <a:font script="Syrc" typeface="Estrangelo Edessa"/>
+        <a:font script="Orya" typeface="Kalinga"/>
+        <a:font script="Mlym" typeface="Kartika"/>
+        <a:font script="Laoo" typeface="DokChampa"/>
+        <a:font script="Sinh" typeface="Iskoola Pota"/>
+        <a:font script="Mong" typeface="Mongolian Baiti"/>
+        <a:font script="Viet" typeface="Times New Roman"/>
+        <a:font script="Uigh" typeface="Microsoft Uighur"/>
+        <a:font script="Geor" typeface="Sylfaen"/>
+        <a:font script="Armn" typeface="Arial"/>
+        <a:font script="Bugi" typeface="Leelawadee UI"/>
+        <a:font script="Bopo" typeface="Microsoft JhengHei"/>
+        <a:font script="Java" typeface="Javanese Text"/>
+        <a:font script="Lisu" typeface="Segoe UI"/>
+        <a:font script="Mymr" typeface="Myanmar Text"/>
+        <a:font script="Nkoo" typeface="Ebrima"/>
+        <a:font script="Olck" typeface="Nirmala UI"/>
+        <a:font script="Osma" typeface="Ebrima"/>
+        <a:font script="Phag" typeface="Phagspa"/>
+        <a:font script="Syrn" typeface="Estrangelo Edessa"/>
+        <a:font script="Syrj" typeface="Estrangelo Edessa"/>
+        <a:font script="Syre" typeface="Estrangelo Edessa"/>
+        <a:font script="Sora" typeface="Nirmala UI"/>
+        <a:font script="Tale" typeface="Microsoft Tai Le"/>
+        <a:font script="Talu" typeface="Microsoft New Tai Lue"/>
+        <a:font script="Tfng" typeface="Ebrima"/>
+      </a:majorFont>
+      <a:minorFont>
+        <a:latin typeface="Aptos" panose="02110004020202020204"/>
+        <a:ea typeface=""/>
+        <a:cs typeface=""/>
+        <a:font script="Jpan" typeface="游ゴシック"/>
+        <a:font script="Hang" typeface="맑은 고딕"/>
+        <a:font script="Hans" typeface="等线"/>
+        <a:font script="Hant" typeface="新細明體"/>
+        <a:font script="Arab" typeface="Arial"/>
+        <a:font script="Hebr" typeface="Arial"/>
+        <a:font script="Thai" typeface="Cordia New"/>
+        <a:font script="Ethi" typeface="Nyala"/>
+        <a:font script="Beng" typeface="Vrinda"/>
+        <a:font script="Gujr" typeface="Shruti"/>
+        <a:font script="Khmr" typeface="DaunPenh"/>
+        <a:font script="Knda" typeface="Tunga"/>
+        <a:font script="Guru" typeface="Raavi"/>
+        <a:font script="Cans" typeface="Euphemia"/>
+        <a:font script="Cher" typeface="Plantagenet Cherokee"/>
+        <a:font script="Yiii" typeface="Microsoft Yi Baiti"/>
+        <a:font script="Tibt" typeface="Microsoft Himalaya"/>
+        <a:font script="Thaa" typeface="MV Boli"/>
+        <a:font script="Deva" typeface="Mangal"/>
+        <a:font script="Telu" typeface="Gautami"/>
+        <a:font script="Taml" typeface="Latha"/>
+        <a:font script="Syrc" typeface="Estrangelo Edessa"/>
+        <a:font script="Orya" typeface="Kalinga"/>
+        <a:font script="Mlym" typeface="Kartika"/>
+        <a:font script="Laoo" typeface="DokChampa"/>
+        <a:font script="Sinh" typeface="Iskoola Pota"/>
+        <a:font script="Mong" typeface="Mongolian Baiti"/>
+        <a:font script="Viet" typeface="Arial"/>
+        <a:font script="Uigh" typeface="Microsoft Uighur"/>
+        <a:font script="Geor" typeface="Sylfaen"/>
+        <a:font script="Armn" typeface="Arial"/>
+        <a:font script="Bugi" typeface="Leelawadee UI"/>
+        <a:font script="Bopo" typeface="Microsoft JhengHei"/>
+        <a:font script="Java" typeface="Javanese Text"/>
+        <a:font script="Lisu" typeface="Segoe UI"/>
+        <a:font script="Mymr" typeface="Myanmar Text"/>
+        <a:font script="Nkoo" typeface="Ebrima"/>
+        <a:font script="Olck" typeface="Nirmala UI"/>
+        <a:font script="Osma" typeface="Ebrima"/>
+        <a:font script="Phag" typeface="Phagspa"/>
+        <a:font script="Syrn" typeface="Estrangelo Edessa"/>
+        <a:font script="Syrj" typeface="Estrangelo Edessa"/>
+        <a:font script="Syre" typeface="Estrangelo Edessa"/>
+        <a:font script="Sora" typeface="Nirmala UI"/>
+        <a:font script="Tale" typeface="Microsoft Tai Le"/>
+        <a:font script="Talu" typeface="Microsoft New Tai Lue"/>
+        <a:font script="Tfng" typeface="Ebrima"/>
+      </a:minorFont>
+    </a:fontScheme>
+    <a:fmtScheme name="Office">
+      <a:fillStyleLst>
+        <a:solidFill>
+          <a:schemeClr val="phClr"/>
+        </a:solidFill>
+        <a:gradFill rotWithShape="1">
+          <a:gsLst>
+            <a:gs pos="0">
+              <a:schemeClr val="phClr">
+                <a:lumMod val="110000"/>
+                <a:satMod val="105000"/>
+                <a:tint val="67000"/>
+              </a:schemeClr>
+            </a:gs>
+            <a:gs pos="50000">
+              <a:schemeClr val="phClr">
+                <a:lumMod val="105000"/>
+                <a:satMod val="103000"/>
+                <a:tint val="73000"/>
+              </a:schemeClr>
+            </a:gs>
+            <a:gs pos="100000">
+              <a:schemeClr val="phClr">
+                <a:lumMod val="105000"/>
+                <a:satMod val="109000"/>
+                <a:tint val="81000"/>
+              </a:schemeClr>
+            </a:gs>
+          </a:gsLst>
+          <a:lin ang="5400000" scaled="0"/>
+        </a:gradFill>
+        <a:gradFill rotWithShape="1">
+          <a:gsLst>
+            <a:gs pos="0">
+              <a:schemeClr val="phClr">
+                <a:satMod val="103000"/>
+                <a:lumMod val="102000"/>
+                <a:tint val="94000"/>
+              </a:schemeClr>
+            </a:gs>
+            <a:gs pos="50000">
+              <a:schemeClr val="phClr">
+                <a:satMod val="110000"/>
+                <a:lumMod val="100000"/>
+                <a:shade val="100000"/>
+              </a:schemeClr>
+            </a:gs>
+            <a:gs pos="100000">
+              <a:schemeClr val="phClr">
+                <a:lumMod val="99000"/>
+                <a:satMod val="120000"/>
+                <a:shade val="78000"/>
+              </a:schemeClr>
+            </a:gs>
+          </a:gsLst>
+          <a:lin ang="5400000" scaled="0"/>
+        </a:gradFill>
+      </a:fillStyleLst>
+      <a:lnStyleLst>
+        <a:ln w="12700" cap="flat" cmpd="sng" algn="ctr">
+          <a:solidFill>
+            <a:schemeClr val="phClr"/>
+          </a:solidFill>
+          <a:prstDash val="solid"/>
+          <a:miter lim="800000"/>
+        </a:ln>
+        <a:ln w="19050" cap="flat" cmpd="sng" algn="ctr">
+          <a:solidFill>
+            <a:schemeClr val="phClr"/>
+          </a:solidFill>
+          <a:prstDash val="solid"/>
+          <a:miter lim="800000"/>
+        </a:ln>
+        <a:ln w="25400" cap="flat" cmpd="sng" algn="ctr">
+          <a:solidFill>
+            <a:schemeClr val="phClr"/>
+          </a:solidFill>
+          <a:prstDash val="solid"/>
+          <a:miter lim="800000"/>
+        </a:ln>
+      </a:lnStyleLst>
+      <a:effectStyleLst>
+        <a:effectStyle>
+          <a:effectLst/>
+        </a:effectStyle>
+        <a:effectStyle>
+          <a:effectLst/>
+        </a:effectStyle>
+        <a:effectStyle>
+          <a:effectLst>
+            <a:outerShdw blurRad="57150" dist="19050" dir="5400000" algn="ctr" rotWithShape="0">
+              <a:srgbClr val="000000">
+                <a:alpha val="63000"/>
+              </a:srgbClr>
+            </a:outerShdw>
+          </a:effectLst>
+        </a:effectStyle>
+      </a:effectStyleLst>
+      <a:bgFillStyleLst>
+        <a:solidFill>
+          <a:schemeClr val="phClr"/>
+        </a:solidFill>
+        <a:solidFill>
+          <a:schemeClr val="phClr">
+            <a:tint val="95000"/>
+            <a:satMod val="170000"/>
+          </a:schemeClr>
+        </a:solidFill>
+        <a:gradFill rotWithShape="1">
+          <a:gsLst>
+            <a:gs pos="0">
+              <a:schemeClr val="phClr">
+                <a:tint val="93000"/>
+                <a:satMod val="150000"/>
+                <a:shade val="98000"/>
+                <a:lumMod val="102000"/>
+              </a:schemeClr>
+            </a:gs>
+            <a:gs pos="50000">
+              <a:schemeClr val="phClr">
+                <a:tint val="98000"/>
+                <a:satMod val="130000"/>
+                <a:shade val="90000"/>
+                <a:lumMod val="103000"/>
+              </a:schemeClr>
+            </a:gs>
+            <a:gs pos="100000">
+              <a:schemeClr val="phClr">
+                <a:shade val="63000"/>
+                <a:satMod val="120000"/>
+              </a:schemeClr>
+            </a:gs>
+          </a:gsLst>
+          <a:lin ang="5400000" scaled="0"/>
+        </a:gradFill>
+      </a:bgFillStyleLst>
+    </a:fmtScheme>
+  </a:themeElements>
+  <a:objectDefaults>
+    <a:lnDef>
+      <a:spPr/>
+      <a:bodyPr/>
+      <a:lstStyle/>
+      <a:style>
+        <a:lnRef idx="2">
+          <a:schemeClr val="accent1"/>
+        </a:lnRef>
+        <a:fillRef idx="0">
+          <a:schemeClr val="accent1"/>
+        </a:fillRef>
+        <a:effectRef idx="1">
+          <a:schemeClr val="accent1"/>
+        </a:effectRef>
+        <a:fontRef idx="minor">
+          <a:schemeClr val="tx1"/>
+        </a:fontRef>
+      </a:style>
+    </a:lnDef>
+  </a:objectDefaults>
+  <a:extraClrSchemeLst/>
+  <a:extLst>
+    <a:ext uri="{05A4C25C-085E-4340-85A3-A5531E510DB2}">
+      <thm15:themeFamily xmlns:thm15="http://schemas.microsoft.com/office/thememl/2012/main" name="Office Theme" id="{2E142A2C-CD16-42D6-873A-C26D2A0506FA}" vid="{1BDDFF52-6CD6-40A5-AB3C-68EB2F1E4D0A}"/>
+    </a:ext>
+  </a:extLst>
+</a:theme>
 </file>